--- a/exports/pptx/lessons/middle-module-06-moon-phases-tithi/day-10-final-assessment.pptx
+++ b/exports/pptx/lessons/middle-module-06-moon-phases-tithi/day-10-final-assessment.pptx
@@ -17,9 +17,11 @@
     <p:sldId id="265" r:id="rId11"/>
     <p:sldId id="266" r:id="rId12"/>
     <p:sldId id="267" r:id="rId13"/>
+    <p:sldId id="268" r:id="rId14"/>
+    <p:sldId id="269" r:id="rId15"/>
   </p:sldIdLst>
   <p:notesMasterIdLst>
-    <p:notesMasterId r:id="rId14"/>
+    <p:notesMasterId r:id="rId16"/>
   </p:notesMasterIdLst>
   <p:sldSz cx="9144000" cy="5143500"/>
   <p:notesSz cx="5143500" cy="9144000"/>
@@ -801,6 +803,182 @@
             <a:fld id="{F7021451-1387-4CA6-816F-3879F97B5CBC}" type="slidenum">
               <a:rPr lang="en-US"/>
               <a:t>12</a:t>
+            </a:fld>
+            <a:endParaRPr lang="en-US"/>
+          </a:p>
+        </p:txBody>
+      </p:sp>
+    </p:spTree>
+    <p:extLst>
+      <p:ext uri="{BB962C8B-B14F-4D97-AF65-F5344CB8AC3E}">
+        <p14:creationId xmlns:p14="http://schemas.microsoft.com/office/powerpoint/2010/main" val="1024086991"/>
+      </p:ext>
+    </p:extLst>
+  </p:cSld>
+  <p:clrMapOvr>
+    <a:masterClrMapping/>
+  </p:clrMapOvr>
+</p:notes>
+</file>
+
+<file path=ppt/notesSlides/notesSlide13.xml><?xml version="1.0" encoding="utf-8"?>
+<p:notes xmlns:a="http://schemas.openxmlformats.org/drawingml/2006/main" xmlns:r="http://schemas.openxmlformats.org/officeDocument/2006/relationships" xmlns:p="http://schemas.openxmlformats.org/presentationml/2006/main">
+  <p:cSld>
+    <p:spTree>
+      <p:nvGrpSpPr>
+        <p:cNvPr id="1" name=""/>
+        <p:cNvGrpSpPr/>
+        <p:nvPr/>
+      </p:nvGrpSpPr>
+      <p:grpSpPr>
+        <a:xfrm>
+          <a:off x="0" y="0"/>
+          <a:ext cx="0" cy="0"/>
+          <a:chOff x="0" y="0"/>
+          <a:chExt cx="0" cy="0"/>
+        </a:xfrm>
+      </p:grpSpPr>
+      <p:sp>
+        <p:nvSpPr>
+          <p:cNvPr id="2" name="Slide Image Placeholder 1"/>
+          <p:cNvSpPr>
+            <a:spLocks noGrp="1" noRot="1" noChangeAspect="1"/>
+          </p:cNvSpPr>
+          <p:nvPr>
+            <p:ph type="sldImg"/>
+          </p:nvPr>
+        </p:nvSpPr>
+        <p:spPr/>
+      </p:sp>
+      <p:sp>
+        <p:nvSpPr>
+          <p:cNvPr id="3" name="Notes Placeholder 2"/>
+          <p:cNvSpPr>
+            <a:spLocks noGrp="1"/>
+          </p:cNvSpPr>
+          <p:nvPr>
+            <p:ph type="body" idx="1"/>
+          </p:nvPr>
+        </p:nvSpPr>
+        <p:spPr/>
+        <p:txBody>
+          <a:bodyPr/>
+          <a:lstStyle/>
+          <a:p>
+            <a:r>
+              <a:rPr lang="en-US" dirty="0"/>
+              <a:t/>
+            </a:r>
+            <a:endParaRPr lang="en-US" dirty="0"/>
+          </a:p>
+        </p:txBody>
+      </p:sp>
+      <p:sp>
+        <p:nvSpPr>
+          <p:cNvPr id="4" name="Slide Number Placeholder 3"/>
+          <p:cNvSpPr>
+            <a:spLocks noGrp="1"/>
+          </p:cNvSpPr>
+          <p:nvPr>
+            <p:ph type="sldNum" sz="quarter" idx="10"/>
+          </p:nvPr>
+        </p:nvSpPr>
+        <p:spPr/>
+        <p:txBody>
+          <a:bodyPr/>
+          <a:lstStyle/>
+          <a:p>
+            <a:fld id="{F7021451-1387-4CA6-816F-3879F97B5CBC}" type="slidenum">
+              <a:rPr lang="en-US"/>
+              <a:t>13</a:t>
+            </a:fld>
+            <a:endParaRPr lang="en-US"/>
+          </a:p>
+        </p:txBody>
+      </p:sp>
+    </p:spTree>
+    <p:extLst>
+      <p:ext uri="{BB962C8B-B14F-4D97-AF65-F5344CB8AC3E}">
+        <p14:creationId xmlns:p14="http://schemas.microsoft.com/office/powerpoint/2010/main" val="1024086991"/>
+      </p:ext>
+    </p:extLst>
+  </p:cSld>
+  <p:clrMapOvr>
+    <a:masterClrMapping/>
+  </p:clrMapOvr>
+</p:notes>
+</file>
+
+<file path=ppt/notesSlides/notesSlide14.xml><?xml version="1.0" encoding="utf-8"?>
+<p:notes xmlns:a="http://schemas.openxmlformats.org/drawingml/2006/main" xmlns:r="http://schemas.openxmlformats.org/officeDocument/2006/relationships" xmlns:p="http://schemas.openxmlformats.org/presentationml/2006/main">
+  <p:cSld>
+    <p:spTree>
+      <p:nvGrpSpPr>
+        <p:cNvPr id="1" name=""/>
+        <p:cNvGrpSpPr/>
+        <p:nvPr/>
+      </p:nvGrpSpPr>
+      <p:grpSpPr>
+        <a:xfrm>
+          <a:off x="0" y="0"/>
+          <a:ext cx="0" cy="0"/>
+          <a:chOff x="0" y="0"/>
+          <a:chExt cx="0" cy="0"/>
+        </a:xfrm>
+      </p:grpSpPr>
+      <p:sp>
+        <p:nvSpPr>
+          <p:cNvPr id="2" name="Slide Image Placeholder 1"/>
+          <p:cNvSpPr>
+            <a:spLocks noGrp="1" noRot="1" noChangeAspect="1"/>
+          </p:cNvSpPr>
+          <p:nvPr>
+            <p:ph type="sldImg"/>
+          </p:nvPr>
+        </p:nvSpPr>
+        <p:spPr/>
+      </p:sp>
+      <p:sp>
+        <p:nvSpPr>
+          <p:cNvPr id="3" name="Notes Placeholder 2"/>
+          <p:cNvSpPr>
+            <a:spLocks noGrp="1"/>
+          </p:cNvSpPr>
+          <p:nvPr>
+            <p:ph type="body" idx="1"/>
+          </p:nvPr>
+        </p:nvSpPr>
+        <p:spPr/>
+        <p:txBody>
+          <a:bodyPr/>
+          <a:lstStyle/>
+          <a:p>
+            <a:r>
+              <a:rPr lang="en-US" dirty="0"/>
+              <a:t/>
+            </a:r>
+            <a:endParaRPr lang="en-US" dirty="0"/>
+          </a:p>
+        </p:txBody>
+      </p:sp>
+      <p:sp>
+        <p:nvSpPr>
+          <p:cNvPr id="4" name="Slide Number Placeholder 3"/>
+          <p:cNvSpPr>
+            <a:spLocks noGrp="1"/>
+          </p:cNvSpPr>
+          <p:nvPr>
+            <p:ph type="sldNum" sz="quarter" idx="10"/>
+          </p:nvPr>
+        </p:nvSpPr>
+        <p:spPr/>
+        <p:txBody>
+          <a:bodyPr/>
+          <a:lstStyle/>
+          <a:p>
+            <a:fld id="{F7021451-1387-4CA6-816F-3879F97B5CBC}" type="slidenum">
+              <a:rPr lang="en-US"/>
+              <a:t>14</a:t>
             </a:fld>
             <a:endParaRPr lang="en-US"/>
           </a:p>
@@ -2100,102 +2278,6 @@
         </p:nvSpPr>
         <p:spPr>
           <a:xfrm>
-            <a:off x="406301" y="1223963"/>
-            <a:ext cx="8498026" cy="274290"/>
-          </a:xfrm>
-          <a:prstGeom prst="rect">
-            <a:avLst/>
-          </a:prstGeom>
-          <a:noFill/>
-          <a:ln/>
-        </p:spPr>
-        <p:txBody>
-          <a:bodyPr wrap="square" lIns="0" tIns="0" rIns="0" bIns="0" rtlCol="0" anchor="t"/>
-          <a:lstStyle/>
-          <a:p>
-            <a:pPr algn="l" indent="0" marL="0">
-              <a:lnSpc>
-                <a:spcPts val="2160"/>
-              </a:lnSpc>
-              <a:spcBef>
-                <a:spcPts val="600"/>
-              </a:spcBef>
-              <a:spcAft>
-                <a:spcPts val="800"/>
-              </a:spcAft>
-              <a:buNone/>
-            </a:pPr>
-            <a:r>
-              <a:rPr lang="en-US" sz="1800" b="1" dirty="0">
-                <a:solidFill>
-                  <a:srgbClr val="FE4447"/>
-                </a:solidFill>
-                <a:latin typeface="Georgia" pitchFamily="34" charset="0"/>
-                <a:ea typeface="Georgia" pitchFamily="34" charset="-122"/>
-                <a:cs typeface="Georgia" pitchFamily="34" charset="-120"/>
-              </a:rPr>
-              <a:t>Learning objective</a:t>
-            </a:r>
-            <a:endParaRPr lang="en-US" sz="1800" dirty="0"/>
-          </a:p>
-        </p:txBody>
-      </p:sp>
-      <p:sp>
-        <p:nvSpPr>
-          <p:cNvPr id="6" name="Text 4"/>
-          <p:cNvSpPr/>
-          <p:nvPr/>
-        </p:nvSpPr>
-        <p:spPr>
-          <a:xfrm>
-            <a:off x="406301" y="1637854"/>
-            <a:ext cx="8498026" cy="426541"/>
-          </a:xfrm>
-          <a:prstGeom prst="rect">
-            <a:avLst/>
-          </a:prstGeom>
-          <a:noFill/>
-          <a:ln/>
-        </p:spPr>
-        <p:txBody>
-          <a:bodyPr wrap="square" lIns="0" tIns="0" rIns="0" bIns="0" rtlCol="0" anchor="t"/>
-          <a:lstStyle/>
-          <a:p>
-            <a:pPr algn="l" indent="0" marL="0">
-              <a:lnSpc>
-                <a:spcPts val="1680"/>
-              </a:lnSpc>
-              <a:spcBef>
-                <a:spcPts val="300"/>
-              </a:spcBef>
-              <a:spcAft>
-                <a:spcPts val="300"/>
-              </a:spcAft>
-              <a:buNone/>
-            </a:pPr>
-            <a:r>
-              <a:rPr lang="en-US" sz="1200" dirty="0">
-                <a:solidFill>
-                  <a:srgbClr val="1C2833"/>
-                </a:solidFill>
-                <a:latin typeface="Arial" pitchFamily="34" charset="0"/>
-                <a:ea typeface="Arial" pitchFamily="34" charset="-122"/>
-                <a:cs typeface="Arial" pitchFamily="34" charset="-120"/>
-              </a:rPr>
-              <a:t>Students demonstrate the module's full set of objectives through a summative quiz, and present their projects in 3 minutes per pair to the class.</a:t>
-            </a:r>
-            <a:endParaRPr lang="en-US" sz="1200" dirty="0"/>
-          </a:p>
-        </p:txBody>
-      </p:sp>
-      <p:sp>
-        <p:nvSpPr>
-          <p:cNvPr id="7" name="Text 5"/>
-          <p:cNvSpPr/>
-          <p:nvPr/>
-        </p:nvSpPr>
-        <p:spPr>
-          <a:xfrm>
             <a:off x="406301" y="4434929"/>
             <a:ext cx="8498026" cy="213271"/>
           </a:xfrm>
@@ -2340,7 +2422,7 @@
                 <a:ea typeface="Georgia" pitchFamily="34" charset="-122"/>
                 <a:cs typeface="Georgia" pitchFamily="34" charset="-120"/>
               </a:rPr>
-              <a:t>Differentiation</a:t>
+              <a:t>Student-facing content</a:t>
             </a:r>
             <a:endParaRPr lang="en-US" sz="1800" dirty="0"/>
           </a:p>
@@ -2354,8 +2436,61 @@
         </p:nvSpPr>
         <p:spPr>
           <a:xfrm>
-            <a:off x="634901" y="883593"/>
-            <a:ext cx="8102798" cy="937022"/>
+            <a:off x="406301" y="883593"/>
+            <a:ext cx="8331398" cy="1957388"/>
+          </a:xfrm>
+          <a:prstGeom prst="rect">
+            <a:avLst/>
+          </a:prstGeom>
+          <a:solidFill>
+            <a:srgbClr val="F4F8F9"/>
+          </a:solidFill>
+          <a:ln/>
+        </p:spPr>
+        <p:txBody>
+          <a:bodyPr wrap="square" rtlCol="0" anchor="ctr"/>
+          <a:lstStyle/>
+          <a:p>
+            <a:pPr indent="0" marL="0">
+              <a:buNone/>
+            </a:pPr>
+            <a:endParaRPr lang="en-US" dirty="0"/>
+          </a:p>
+        </p:txBody>
+      </p:sp>
+      <p:sp>
+        <p:nvSpPr>
+          <p:cNvPr id="5" name="Shape 3"/>
+          <p:cNvSpPr/>
+          <p:nvPr/>
+        </p:nvSpPr>
+        <p:spPr>
+          <a:xfrm>
+            <a:off x="434876" y="883593"/>
+            <a:ext cx="0" cy="1957388"/>
+          </a:xfrm>
+          <a:prstGeom prst="line">
+            <a:avLst/>
+          </a:prstGeom>
+          <a:noFill/>
+          <a:ln w="57150">
+            <a:solidFill>
+              <a:srgbClr val="FE4447"/>
+            </a:solidFill>
+            <a:prstDash val="solid"/>
+          </a:ln>
+        </p:spPr>
+      </p:sp>
+      <p:sp>
+        <p:nvSpPr>
+          <p:cNvPr id="6" name="Text 4"/>
+          <p:cNvSpPr/>
+          <p:nvPr/>
+        </p:nvSpPr>
+        <p:spPr>
+          <a:xfrm>
+            <a:off x="692051" y="1074093"/>
+            <a:ext cx="7973389" cy="230981"/>
           </a:xfrm>
           <a:prstGeom prst="rect">
             <a:avLst/>
@@ -2367,98 +2502,276 @@
           <a:bodyPr wrap="square" lIns="0" tIns="0" rIns="0" bIns="0" rtlCol="0" anchor="t"/>
           <a:lstStyle/>
           <a:p>
-            <a:pPr algn="l" marL="342900" indent="-342900">
-              <a:lnSpc>
-                <a:spcPts val="1620"/>
-              </a:lnSpc>
-              <a:spcAft>
-                <a:spcPts val="300"/>
-              </a:spcAft>
-              <a:buSzPct val="100000"/>
-              <a:buChar char="•"/>
-            </a:pPr>
-            <a:r>
-              <a:rPr lang="en-US" sz="1200" b="1" dirty="0">
-                <a:solidFill>
-                  <a:srgbClr val="1C2833"/>
-                </a:solidFill>
-                <a:latin typeface="Arial" pitchFamily="34" charset="0"/>
-                <a:ea typeface="Arial" pitchFamily="34" charset="-122"/>
-                <a:cs typeface="Arial" pitchFamily="34" charset="-120"/>
-              </a:rPr>
-              <a:t>One tier up:</a:t>
-            </a:r>
             <a:pPr algn="l" indent="0" marL="0">
               <a:lnSpc>
-                <a:spcPts val="1620"/>
-              </a:lnSpc>
-              <a:spcAft>
-                <a:spcPts val="300"/>
-              </a:spcAft>
-              <a:buNone/>
-            </a:pPr>
-            <a:r>
-              <a:rPr lang="en-US" sz="1200" dirty="0">
-                <a:solidFill>
-                  <a:srgbClr val="1C2833"/>
-                </a:solidFill>
-                <a:latin typeface="Arial" pitchFamily="34" charset="0"/>
-                <a:ea typeface="Arial" pitchFamily="34" charset="-122"/>
-                <a:cs typeface="Arial" pitchFamily="34" charset="-120"/>
-              </a:rPr>
-              <a:t> Volunteer to be the audience-facing rubric scorer (anonymously) — practice the discipline of assessing peers fairly.</a:t>
-            </a:r>
-            <a:endParaRPr lang="en-US" sz="1200" dirty="0"/>
-          </a:p>
-          <a:p>
-            <a:pPr algn="l" marL="342900" indent="-342900">
-              <a:lnSpc>
-                <a:spcPts val="1620"/>
-              </a:lnSpc>
-              <a:spcAft>
-                <a:spcPts val="300"/>
-              </a:spcAft>
-              <a:buSzPct val="100000"/>
-              <a:buChar char="•"/>
-            </a:pPr>
-            <a:r>
-              <a:rPr lang="en-US" sz="1200" b="1" dirty="0">
-                <a:solidFill>
-                  <a:srgbClr val="1C2833"/>
-                </a:solidFill>
-                <a:latin typeface="Arial" pitchFamily="34" charset="0"/>
-                <a:ea typeface="Arial" pitchFamily="34" charset="-122"/>
-                <a:cs typeface="Arial" pitchFamily="34" charset="-120"/>
-              </a:rPr>
-              <a:t>One tier down:</a:t>
-            </a:r>
+                <a:spcPts val="1820"/>
+              </a:lnSpc>
+              <a:spcBef>
+                <a:spcPts val="300"/>
+              </a:spcBef>
+              <a:spcAft>
+                <a:spcPts val="300"/>
+              </a:spcAft>
+              <a:buNone/>
+            </a:pPr>
+            <a:r>
+              <a:rPr lang="en-US" sz="1300" b="1" i="1" dirty="0">
+                <a:solidFill>
+                  <a:srgbClr val="1C2833"/>
+                </a:solidFill>
+                <a:latin typeface="Georgia" pitchFamily="34" charset="0"/>
+                <a:ea typeface="Georgia" pitchFamily="34" charset="-122"/>
+                <a:cs typeface="Georgia" pitchFamily="34" charset="-120"/>
+              </a:rPr>
+              <a:t>Module complete.</a:t>
+            </a:r>
+            <a:endParaRPr lang="en-US" sz="1300" dirty="0"/>
+          </a:p>
+        </p:txBody>
+      </p:sp>
+      <p:sp>
+        <p:nvSpPr>
+          <p:cNvPr id="7" name="Text 5"/>
+          <p:cNvSpPr/>
+          <p:nvPr/>
+        </p:nvSpPr>
+        <p:spPr>
+          <a:xfrm>
+            <a:off x="692051" y="1343174"/>
+            <a:ext cx="7973389" cy="230981"/>
+          </a:xfrm>
+          <a:prstGeom prst="rect">
+            <a:avLst/>
+          </a:prstGeom>
+          <a:noFill/>
+          <a:ln/>
+        </p:spPr>
+        <p:txBody>
+          <a:bodyPr wrap="square" lIns="0" tIns="0" rIns="0" bIns="0" rtlCol="0" anchor="t"/>
+          <a:lstStyle/>
+          <a:p>
             <a:pPr algn="l" indent="0" marL="0">
               <a:lnSpc>
-                <a:spcPts val="1620"/>
-              </a:lnSpc>
-              <a:spcAft>
-                <a:spcPts val="300"/>
-              </a:spcAft>
-              <a:buNone/>
-            </a:pPr>
-            <a:r>
-              <a:rPr lang="en-US" sz="1200" dirty="0">
-                <a:solidFill>
-                  <a:srgbClr val="1C2833"/>
-                </a:solidFill>
-                <a:latin typeface="Arial" pitchFamily="34" charset="0"/>
-                <a:ea typeface="Arial" pitchFamily="34" charset="-122"/>
-                <a:cs typeface="Arial" pitchFamily="34" charset="-120"/>
-              </a:rPr>
-              <a:t> Students who couldn't finish their project today have until next class to submit. Don't penalise on Day 10 if the artefact is 80% done.</a:t>
-            </a:r>
-            <a:endParaRPr lang="en-US" sz="1200" dirty="0"/>
-          </a:p>
-        </p:txBody>
-      </p:sp>
-      <p:sp>
-        <p:nvSpPr>
-          <p:cNvPr id="5" name="Text 3"/>
+                <a:spcPts val="1820"/>
+              </a:lnSpc>
+              <a:spcBef>
+                <a:spcPts val="300"/>
+              </a:spcBef>
+              <a:spcAft>
+                <a:spcPts val="300"/>
+              </a:spcAft>
+              <a:buNone/>
+            </a:pPr>
+            <a:r>
+              <a:rPr lang="en-US" sz="1300" i="1" dirty="0">
+                <a:solidFill>
+                  <a:srgbClr val="1C2833"/>
+                </a:solidFill>
+                <a:latin typeface="Georgia" pitchFamily="34" charset="0"/>
+                <a:ea typeface="Georgia" pitchFamily="34" charset="-122"/>
+                <a:cs typeface="Georgia" pitchFamily="34" charset="-120"/>
+              </a:rPr>
+              <a:t>Today:</a:t>
+            </a:r>
+            <a:endParaRPr lang="en-US" sz="1300" dirty="0"/>
+          </a:p>
+        </p:txBody>
+      </p:sp>
+      <p:sp>
+        <p:nvSpPr>
+          <p:cNvPr id="8" name="Text 6"/>
+          <p:cNvSpPr/>
+          <p:nvPr/>
+        </p:nvSpPr>
+        <p:spPr>
+          <a:xfrm>
+            <a:off x="692051" y="1612255"/>
+            <a:ext cx="7973389" cy="230981"/>
+          </a:xfrm>
+          <a:prstGeom prst="rect">
+            <a:avLst/>
+          </a:prstGeom>
+          <a:noFill/>
+          <a:ln/>
+        </p:spPr>
+        <p:txBody>
+          <a:bodyPr wrap="square" lIns="0" tIns="0" rIns="0" bIns="0" rtlCol="0" anchor="t"/>
+          <a:lstStyle/>
+          <a:p>
+            <a:pPr algn="l" indent="0" marL="0">
+              <a:lnSpc>
+                <a:spcPts val="1820"/>
+              </a:lnSpc>
+              <a:spcBef>
+                <a:spcPts val="300"/>
+              </a:spcBef>
+              <a:spcAft>
+                <a:spcPts val="300"/>
+              </a:spcAft>
+              <a:buNone/>
+            </a:pPr>
+            <a:r>
+              <a:rPr lang="en-US" sz="1300" i="1" dirty="0">
+                <a:solidFill>
+                  <a:srgbClr val="1C2833"/>
+                </a:solidFill>
+                <a:latin typeface="Georgia" pitchFamily="34" charset="0"/>
+                <a:ea typeface="Georgia" pitchFamily="34" charset="-122"/>
+                <a:cs typeface="Georgia" pitchFamily="34" charset="-120"/>
+              </a:rPr>
+              <a:t>Summative quiz — 20 min, individual, closed book.</a:t>
+            </a:r>
+            <a:endParaRPr lang="en-US" sz="1300" dirty="0"/>
+          </a:p>
+        </p:txBody>
+      </p:sp>
+      <p:sp>
+        <p:nvSpPr>
+          <p:cNvPr id="9" name="Text 7"/>
+          <p:cNvSpPr/>
+          <p:nvPr/>
+        </p:nvSpPr>
+        <p:spPr>
+          <a:xfrm>
+            <a:off x="692051" y="1881336"/>
+            <a:ext cx="7973389" cy="230981"/>
+          </a:xfrm>
+          <a:prstGeom prst="rect">
+            <a:avLst/>
+          </a:prstGeom>
+          <a:noFill/>
+          <a:ln/>
+        </p:spPr>
+        <p:txBody>
+          <a:bodyPr wrap="square" lIns="0" tIns="0" rIns="0" bIns="0" rtlCol="0" anchor="t"/>
+          <a:lstStyle/>
+          <a:p>
+            <a:pPr algn="l" indent="0" marL="0">
+              <a:lnSpc>
+                <a:spcPts val="1820"/>
+              </a:lnSpc>
+              <a:spcBef>
+                <a:spcPts val="300"/>
+              </a:spcBef>
+              <a:spcAft>
+                <a:spcPts val="300"/>
+              </a:spcAft>
+              <a:buNone/>
+            </a:pPr>
+            <a:r>
+              <a:rPr lang="en-US" sz="1300" i="1" dirty="0">
+                <a:solidFill>
+                  <a:srgbClr val="1C2833"/>
+                </a:solidFill>
+                <a:latin typeface="Georgia" pitchFamily="34" charset="0"/>
+                <a:ea typeface="Georgia" pitchFamily="34" charset="-122"/>
+                <a:cs typeface="Georgia" pitchFamily="34" charset="-120"/>
+              </a:rPr>
+              <a:t>Showcase — 3 minutes per pair + 1-minute Q&amp;A.</a:t>
+            </a:r>
+            <a:endParaRPr lang="en-US" sz="1300" dirty="0"/>
+          </a:p>
+        </p:txBody>
+      </p:sp>
+      <p:sp>
+        <p:nvSpPr>
+          <p:cNvPr id="10" name="Text 8"/>
+          <p:cNvSpPr/>
+          <p:nvPr/>
+        </p:nvSpPr>
+        <p:spPr>
+          <a:xfrm>
+            <a:off x="692051" y="2150418"/>
+            <a:ext cx="7973389" cy="230981"/>
+          </a:xfrm>
+          <a:prstGeom prst="rect">
+            <a:avLst/>
+          </a:prstGeom>
+          <a:noFill/>
+          <a:ln/>
+        </p:spPr>
+        <p:txBody>
+          <a:bodyPr wrap="square" lIns="0" tIns="0" rIns="0" bIns="0" rtlCol="0" anchor="t"/>
+          <a:lstStyle/>
+          <a:p>
+            <a:pPr algn="l" indent="0" marL="0">
+              <a:lnSpc>
+                <a:spcPts val="1820"/>
+              </a:lnSpc>
+              <a:spcBef>
+                <a:spcPts val="300"/>
+              </a:spcBef>
+              <a:spcAft>
+                <a:spcPts val="300"/>
+              </a:spcAft>
+              <a:buNone/>
+            </a:pPr>
+            <a:r>
+              <a:rPr lang="en-US" sz="1300" i="1" dirty="0">
+                <a:solidFill>
+                  <a:srgbClr val="1C2833"/>
+                </a:solidFill>
+                <a:latin typeface="Georgia" pitchFamily="34" charset="0"/>
+                <a:ea typeface="Georgia" pitchFamily="34" charset="-122"/>
+                <a:cs typeface="Georgia" pitchFamily="34" charset="-120"/>
+              </a:rPr>
+              <a:t>Reflection slip submitted.</a:t>
+            </a:r>
+            <a:endParaRPr lang="en-US" sz="1300" dirty="0"/>
+          </a:p>
+        </p:txBody>
+      </p:sp>
+      <p:sp>
+        <p:nvSpPr>
+          <p:cNvPr id="11" name="Text 9"/>
+          <p:cNvSpPr/>
+          <p:nvPr/>
+        </p:nvSpPr>
+        <p:spPr>
+          <a:xfrm>
+            <a:off x="692051" y="2419499"/>
+            <a:ext cx="7973389" cy="230981"/>
+          </a:xfrm>
+          <a:prstGeom prst="rect">
+            <a:avLst/>
+          </a:prstGeom>
+          <a:noFill/>
+          <a:ln/>
+        </p:spPr>
+        <p:txBody>
+          <a:bodyPr wrap="square" lIns="0" tIns="0" rIns="0" bIns="0" rtlCol="0" anchor="t"/>
+          <a:lstStyle/>
+          <a:p>
+            <a:pPr algn="l" indent="0" marL="0">
+              <a:lnSpc>
+                <a:spcPts val="1820"/>
+              </a:lnSpc>
+              <a:spcBef>
+                <a:spcPts val="300"/>
+              </a:spcBef>
+              <a:spcAft>
+                <a:spcPts val="300"/>
+              </a:spcAft>
+              <a:buNone/>
+            </a:pPr>
+            <a:r>
+              <a:rPr lang="en-US" sz="1300" i="1" dirty="0">
+                <a:solidFill>
+                  <a:srgbClr val="1C2833"/>
+                </a:solidFill>
+                <a:latin typeface="Georgia" pitchFamily="34" charset="0"/>
+                <a:ea typeface="Georgia" pitchFamily="34" charset="-122"/>
+                <a:cs typeface="Georgia" pitchFamily="34" charset="-120"/>
+              </a:rPr>
+              <a:t>By end of class, you've shown what you learned. Take a breath.</a:t>
+            </a:r>
+            <a:endParaRPr lang="en-US" sz="1300" dirty="0"/>
+          </a:p>
+        </p:txBody>
+      </p:sp>
+      <p:sp>
+        <p:nvSpPr>
+          <p:cNvPr id="12" name="Text 10"/>
           <p:cNvSpPr/>
           <p:nvPr/>
         </p:nvSpPr>
@@ -2608,7 +2921,7 @@
                 <a:ea typeface="Georgia" pitchFamily="34" charset="-122"/>
                 <a:cs typeface="Georgia" pitchFamily="34" charset="-120"/>
               </a:rPr>
-              <a:t>Teacher notes</a:t>
+              <a:t>Homework</a:t>
             </a:r>
             <a:endParaRPr lang="en-US" sz="1800" dirty="0"/>
           </a:p>
@@ -2622,8 +2935,8 @@
         </p:nvSpPr>
         <p:spPr>
           <a:xfrm>
-            <a:off x="406301" y="870942"/>
-            <a:ext cx="8498026" cy="639812"/>
+            <a:off x="634901" y="883593"/>
+            <a:ext cx="8102798" cy="281880"/>
           </a:xfrm>
           <a:prstGeom prst="rect">
             <a:avLst/>
@@ -2635,20 +2948,18 @@
           <a:bodyPr wrap="square" lIns="0" tIns="0" rIns="0" bIns="0" rtlCol="0" anchor="t"/>
           <a:lstStyle/>
           <a:p>
-            <a:pPr algn="l" indent="0" marL="0">
-              <a:lnSpc>
-                <a:spcPts val="1680"/>
-              </a:lnSpc>
-              <a:spcBef>
-                <a:spcPts val="300"/>
-              </a:spcBef>
-              <a:spcAft>
-                <a:spcPts val="300"/>
-              </a:spcAft>
-              <a:buNone/>
-            </a:pPr>
-            <a:r>
-              <a:rPr lang="en-US" sz="1200" dirty="0">
+            <a:pPr algn="l" marL="342900" indent="-342900">
+              <a:lnSpc>
+                <a:spcPts val="1620"/>
+              </a:lnSpc>
+              <a:spcAft>
+                <a:spcPts val="300"/>
+              </a:spcAft>
+              <a:buSzPct val="100000"/>
+              <a:buChar char="•"/>
+            </a:pPr>
+            <a:r>
+              <a:rPr lang="en-US" sz="1200" b="1" dirty="0">
                 <a:solidFill>
                   <a:srgbClr val="1C2833"/>
                 </a:solidFill>
@@ -2656,7 +2967,27 @@
                 <a:ea typeface="Arial" pitchFamily="34" charset="-122"/>
                 <a:cs typeface="Arial" pitchFamily="34" charset="-120"/>
               </a:rPr>
-              <a:t>– Mark the quiz over the weekend; return within 3 school days. – Project rubric marks should be visible to students within 5 school days. – Reflection slips are NOT graded but are read — write one-sentence response on each. – Keep one or two strong projects (with student permission) as exemplars for next year.</a:t>
+              <a:t>None.</a:t>
+            </a:r>
+            <a:pPr algn="l" indent="0" marL="0">
+              <a:lnSpc>
+                <a:spcPts val="1620"/>
+              </a:lnSpc>
+              <a:spcAft>
+                <a:spcPts val="300"/>
+              </a:spcAft>
+              <a:buNone/>
+            </a:pPr>
+            <a:r>
+              <a:rPr lang="en-US" sz="1200" dirty="0">
+                <a:solidFill>
+                  <a:srgbClr val="1C2833"/>
+                </a:solidFill>
+                <a:latin typeface="Arial" pitchFamily="34" charset="0"/>
+                <a:ea typeface="Arial" pitchFamily="34" charset="-122"/>
+                <a:cs typeface="Arial" pitchFamily="34" charset="-120"/>
+              </a:rPr>
+              <a:t> Module complete.</a:t>
             </a:r>
             <a:endParaRPr lang="en-US" sz="1200" dirty="0"/>
           </a:p>
@@ -2814,7 +3145,7 @@
                 <a:ea typeface="Georgia" pitchFamily="34" charset="-122"/>
                 <a:cs typeface="Georgia" pitchFamily="34" charset="-120"/>
               </a:rPr>
-              <a:t>Citation(s) used in this lesson</a:t>
+              <a:t>Differentiation</a:t>
             </a:r>
             <a:endParaRPr lang="en-US" sz="1800" dirty="0"/>
           </a:p>
@@ -2828,8 +3159,8 @@
         </p:nvSpPr>
         <p:spPr>
           <a:xfrm>
-            <a:off x="406301" y="870942"/>
-            <a:ext cx="8498026" cy="213271"/>
+            <a:off x="634901" y="883593"/>
+            <a:ext cx="8102798" cy="937022"/>
           </a:xfrm>
           <a:prstGeom prst="rect">
             <a:avLst/>
@@ -2841,20 +3172,18 @@
           <a:bodyPr wrap="square" lIns="0" tIns="0" rIns="0" bIns="0" rtlCol="0" anchor="t"/>
           <a:lstStyle/>
           <a:p>
-            <a:pPr algn="l" indent="0" marL="0">
-              <a:lnSpc>
-                <a:spcPts val="1680"/>
-              </a:lnSpc>
-              <a:spcBef>
-                <a:spcPts val="300"/>
-              </a:spcBef>
-              <a:spcAft>
-                <a:spcPts val="300"/>
-              </a:spcAft>
-              <a:buNone/>
-            </a:pPr>
-            <a:r>
-              <a:rPr lang="en-US" sz="1200" dirty="0">
+            <a:pPr algn="l" marL="342900" indent="-342900">
+              <a:lnSpc>
+                <a:spcPts val="1620"/>
+              </a:lnSpc>
+              <a:spcAft>
+                <a:spcPts val="300"/>
+              </a:spcAft>
+              <a:buSzPct val="100000"/>
+              <a:buChar char="•"/>
+            </a:pPr>
+            <a:r>
+              <a:rPr lang="en-US" sz="1200" b="1" dirty="0">
                 <a:solidFill>
                   <a:srgbClr val="1C2833"/>
                 </a:solidFill>
@@ -2862,7 +3191,551 @@
                 <a:ea typeface="Arial" pitchFamily="34" charset="-122"/>
                 <a:cs typeface="Arial" pitchFamily="34" charset="-120"/>
               </a:rPr>
-              <a:t>– N/A — this is assessment day.</a:t>
+              <a:t>One tier up:</a:t>
+            </a:r>
+            <a:pPr algn="l" indent="0" marL="0">
+              <a:lnSpc>
+                <a:spcPts val="1620"/>
+              </a:lnSpc>
+              <a:spcAft>
+                <a:spcPts val="300"/>
+              </a:spcAft>
+              <a:buNone/>
+            </a:pPr>
+            <a:r>
+              <a:rPr lang="en-US" sz="1200" dirty="0">
+                <a:solidFill>
+                  <a:srgbClr val="1C2833"/>
+                </a:solidFill>
+                <a:latin typeface="Arial" pitchFamily="34" charset="0"/>
+                <a:ea typeface="Arial" pitchFamily="34" charset="-122"/>
+                <a:cs typeface="Arial" pitchFamily="34" charset="-120"/>
+              </a:rPr>
+              <a:t> Volunteer to be the audience-facing rubric scorer (anonymously) — practice the discipline of assessing peers fairly.</a:t>
+            </a:r>
+            <a:endParaRPr lang="en-US" sz="1200" dirty="0"/>
+          </a:p>
+          <a:p>
+            <a:pPr algn="l" marL="342900" indent="-342900">
+              <a:lnSpc>
+                <a:spcPts val="1620"/>
+              </a:lnSpc>
+              <a:spcAft>
+                <a:spcPts val="300"/>
+              </a:spcAft>
+              <a:buSzPct val="100000"/>
+              <a:buChar char="•"/>
+            </a:pPr>
+            <a:r>
+              <a:rPr lang="en-US" sz="1200" b="1" dirty="0">
+                <a:solidFill>
+                  <a:srgbClr val="1C2833"/>
+                </a:solidFill>
+                <a:latin typeface="Arial" pitchFamily="34" charset="0"/>
+                <a:ea typeface="Arial" pitchFamily="34" charset="-122"/>
+                <a:cs typeface="Arial" pitchFamily="34" charset="-120"/>
+              </a:rPr>
+              <a:t>One tier down:</a:t>
+            </a:r>
+            <a:pPr algn="l" indent="0" marL="0">
+              <a:lnSpc>
+                <a:spcPts val="1620"/>
+              </a:lnSpc>
+              <a:spcAft>
+                <a:spcPts val="300"/>
+              </a:spcAft>
+              <a:buNone/>
+            </a:pPr>
+            <a:r>
+              <a:rPr lang="en-US" sz="1200" dirty="0">
+                <a:solidFill>
+                  <a:srgbClr val="1C2833"/>
+                </a:solidFill>
+                <a:latin typeface="Arial" pitchFamily="34" charset="0"/>
+                <a:ea typeface="Arial" pitchFamily="34" charset="-122"/>
+                <a:cs typeface="Arial" pitchFamily="34" charset="-120"/>
+              </a:rPr>
+              <a:t> Students who couldn't finish their project today have until next class to submit. Don't penalise on Day 10 if the artefact is 80% done.</a:t>
+            </a:r>
+            <a:endParaRPr lang="en-US" sz="1200" dirty="0"/>
+          </a:p>
+        </p:txBody>
+      </p:sp>
+      <p:sp>
+        <p:nvSpPr>
+          <p:cNvPr id="5" name="Text 3"/>
+          <p:cNvSpPr/>
+          <p:nvPr/>
+        </p:nvSpPr>
+        <p:spPr>
+          <a:xfrm>
+            <a:off x="406301" y="4434929"/>
+            <a:ext cx="8498026" cy="213271"/>
+          </a:xfrm>
+          <a:prstGeom prst="rect">
+            <a:avLst/>
+          </a:prstGeom>
+          <a:noFill/>
+          <a:ln/>
+        </p:spPr>
+        <p:txBody>
+          <a:bodyPr wrap="square" lIns="0" tIns="0" rIns="0" bIns="0" rtlCol="0" anchor="t"/>
+          <a:lstStyle/>
+          <a:p>
+            <a:pPr algn="l" indent="0" marL="0">
+              <a:lnSpc>
+                <a:spcPts val="1680"/>
+              </a:lnSpc>
+              <a:spcBef>
+                <a:spcPts val="300"/>
+              </a:spcBef>
+              <a:spcAft>
+                <a:spcPts val="300"/>
+              </a:spcAft>
+              <a:buNone/>
+            </a:pPr>
+            <a:r>
+              <a:rPr lang="en-US" sz="1200" dirty="0">
+                <a:solidFill>
+                  <a:srgbClr val="1C2833"/>
+                </a:solidFill>
+                <a:latin typeface="Arial" pitchFamily="34" charset="0"/>
+                <a:ea typeface="Arial" pitchFamily="34" charset="-122"/>
+                <a:cs typeface="Arial" pitchFamily="34" charset="-120"/>
+              </a:rPr>
+              <a:t>Middle ·  · IKS Curriculum</a:t>
+            </a:r>
+            <a:endParaRPr lang="en-US" sz="1200" dirty="0"/>
+          </a:p>
+        </p:txBody>
+      </p:sp>
+    </p:spTree>
+  </p:cSld>
+  <p:clrMapOvr>
+    <a:masterClrMapping/>
+  </p:clrMapOvr>
+</p:sld>
+</file>
+
+<file path=ppt/slides/slide13.xml><?xml version="1.0" encoding="utf-8"?>
+<p:sld xmlns:a="http://schemas.openxmlformats.org/drawingml/2006/main" xmlns:r="http://schemas.openxmlformats.org/officeDocument/2006/relationships" xmlns:p="http://schemas.openxmlformats.org/presentationml/2006/main">
+  <p:cSld name="Slide 13">
+    <p:bg>
+      <p:bgPr>
+        <a:solidFill>
+          <a:srgbClr val="FFFFFF"/>
+        </a:solidFill>
+      </p:bgPr>
+    </p:bg>
+    <p:spTree>
+      <p:nvGrpSpPr>
+        <p:cNvPr id="1" name=""/>
+        <p:cNvGrpSpPr/>
+        <p:nvPr/>
+      </p:nvGrpSpPr>
+      <p:grpSpPr>
+        <a:xfrm>
+          <a:off x="0" y="0"/>
+          <a:ext cx="0" cy="0"/>
+          <a:chOff x="0" y="0"/>
+          <a:chExt cx="0" cy="0"/>
+        </a:xfrm>
+      </p:grpSpPr>
+      <p:sp>
+        <p:nvSpPr>
+          <p:cNvPr id="2" name="Text 0"/>
+          <p:cNvSpPr/>
+          <p:nvPr/>
+        </p:nvSpPr>
+        <p:spPr>
+          <a:xfrm>
+            <a:off x="0" y="0"/>
+            <a:ext cx="9144000" cy="101501"/>
+          </a:xfrm>
+          <a:prstGeom prst="rect">
+            <a:avLst/>
+          </a:prstGeom>
+          <a:solidFill>
+            <a:srgbClr val="277884"/>
+          </a:solidFill>
+          <a:ln/>
+        </p:spPr>
+        <p:txBody>
+          <a:bodyPr wrap="square" rtlCol="0" anchor="ctr"/>
+          <a:lstStyle/>
+          <a:p>
+            <a:pPr indent="0" marL="0">
+              <a:buNone/>
+            </a:pPr>
+            <a:endParaRPr lang="en-US" dirty="0"/>
+          </a:p>
+        </p:txBody>
+      </p:sp>
+      <p:sp>
+        <p:nvSpPr>
+          <p:cNvPr id="3" name="Text 1"/>
+          <p:cNvSpPr/>
+          <p:nvPr/>
+        </p:nvSpPr>
+        <p:spPr>
+          <a:xfrm>
+            <a:off x="406301" y="457051"/>
+            <a:ext cx="8498026" cy="274290"/>
+          </a:xfrm>
+          <a:prstGeom prst="rect">
+            <a:avLst/>
+          </a:prstGeom>
+          <a:noFill/>
+          <a:ln/>
+        </p:spPr>
+        <p:txBody>
+          <a:bodyPr wrap="square" lIns="0" tIns="0" rIns="0" bIns="0" rtlCol="0" anchor="t"/>
+          <a:lstStyle/>
+          <a:p>
+            <a:pPr algn="l" indent="0" marL="0">
+              <a:lnSpc>
+                <a:spcPts val="2160"/>
+              </a:lnSpc>
+              <a:spcBef>
+                <a:spcPts val="600"/>
+              </a:spcBef>
+              <a:spcAft>
+                <a:spcPts val="800"/>
+              </a:spcAft>
+              <a:buNone/>
+            </a:pPr>
+            <a:r>
+              <a:rPr lang="en-US" sz="1800" b="1" dirty="0">
+                <a:solidFill>
+                  <a:srgbClr val="FE4447"/>
+                </a:solidFill>
+                <a:latin typeface="Georgia" pitchFamily="34" charset="0"/>
+                <a:ea typeface="Georgia" pitchFamily="34" charset="-122"/>
+                <a:cs typeface="Georgia" pitchFamily="34" charset="-120"/>
+              </a:rPr>
+              <a:t>Teacher notes</a:t>
+            </a:r>
+            <a:endParaRPr lang="en-US" sz="1800" dirty="0"/>
+          </a:p>
+        </p:txBody>
+      </p:sp>
+      <p:sp>
+        <p:nvSpPr>
+          <p:cNvPr id="4" name="Text 2"/>
+          <p:cNvSpPr/>
+          <p:nvPr/>
+        </p:nvSpPr>
+        <p:spPr>
+          <a:xfrm>
+            <a:off x="634901" y="883593"/>
+            <a:ext cx="8102798" cy="1013222"/>
+          </a:xfrm>
+          <a:prstGeom prst="rect">
+            <a:avLst/>
+          </a:prstGeom>
+          <a:noFill/>
+          <a:ln/>
+        </p:spPr>
+        <p:txBody>
+          <a:bodyPr wrap="square" lIns="0" tIns="0" rIns="0" bIns="0" rtlCol="0" anchor="t"/>
+          <a:lstStyle/>
+          <a:p>
+            <a:pPr algn="l" marL="342900" indent="-342900">
+              <a:lnSpc>
+                <a:spcPts val="1620"/>
+              </a:lnSpc>
+              <a:spcAft>
+                <a:spcPts val="300"/>
+              </a:spcAft>
+              <a:buSzPct val="100000"/>
+              <a:buChar char="•"/>
+            </a:pPr>
+            <a:r>
+              <a:rPr lang="en-US" sz="1200" dirty="0">
+                <a:solidFill>
+                  <a:srgbClr val="1C2833"/>
+                </a:solidFill>
+                <a:latin typeface="Arial" pitchFamily="34" charset="0"/>
+                <a:ea typeface="Arial" pitchFamily="34" charset="-122"/>
+                <a:cs typeface="Arial" pitchFamily="34" charset="-120"/>
+              </a:rPr>
+              <a:t>Mark the quiz over the weekend; return within 3 school days.</a:t>
+            </a:r>
+            <a:endParaRPr lang="en-US" sz="1200" dirty="0"/>
+          </a:p>
+          <a:p>
+            <a:pPr algn="l" marL="342900" indent="-342900">
+              <a:lnSpc>
+                <a:spcPts val="1620"/>
+              </a:lnSpc>
+              <a:spcAft>
+                <a:spcPts val="300"/>
+              </a:spcAft>
+              <a:buSzPct val="100000"/>
+              <a:buChar char="•"/>
+            </a:pPr>
+            <a:r>
+              <a:rPr lang="en-US" sz="1200" dirty="0">
+                <a:solidFill>
+                  <a:srgbClr val="1C2833"/>
+                </a:solidFill>
+                <a:latin typeface="Arial" pitchFamily="34" charset="0"/>
+                <a:ea typeface="Arial" pitchFamily="34" charset="-122"/>
+                <a:cs typeface="Arial" pitchFamily="34" charset="-120"/>
+              </a:rPr>
+              <a:t>Project rubric marks should be visible to students within 5 school days.</a:t>
+            </a:r>
+            <a:endParaRPr lang="en-US" sz="1200" dirty="0"/>
+          </a:p>
+          <a:p>
+            <a:pPr algn="l" marL="342900" indent="-342900">
+              <a:lnSpc>
+                <a:spcPts val="1620"/>
+              </a:lnSpc>
+              <a:spcAft>
+                <a:spcPts val="300"/>
+              </a:spcAft>
+              <a:buSzPct val="100000"/>
+              <a:buChar char="•"/>
+            </a:pPr>
+            <a:r>
+              <a:rPr lang="en-US" sz="1200" dirty="0">
+                <a:solidFill>
+                  <a:srgbClr val="1C2833"/>
+                </a:solidFill>
+                <a:latin typeface="Arial" pitchFamily="34" charset="0"/>
+                <a:ea typeface="Arial" pitchFamily="34" charset="-122"/>
+                <a:cs typeface="Arial" pitchFamily="34" charset="-120"/>
+              </a:rPr>
+              <a:t>Reflection slips are NOT graded but are read — write one-sentence response on each.</a:t>
+            </a:r>
+            <a:endParaRPr lang="en-US" sz="1200" dirty="0"/>
+          </a:p>
+          <a:p>
+            <a:pPr algn="l" marL="342900" indent="-342900">
+              <a:lnSpc>
+                <a:spcPts val="1620"/>
+              </a:lnSpc>
+              <a:spcAft>
+                <a:spcPts val="300"/>
+              </a:spcAft>
+              <a:buSzPct val="100000"/>
+              <a:buChar char="•"/>
+            </a:pPr>
+            <a:r>
+              <a:rPr lang="en-US" sz="1200" dirty="0">
+                <a:solidFill>
+                  <a:srgbClr val="1C2833"/>
+                </a:solidFill>
+                <a:latin typeface="Arial" pitchFamily="34" charset="0"/>
+                <a:ea typeface="Arial" pitchFamily="34" charset="-122"/>
+                <a:cs typeface="Arial" pitchFamily="34" charset="-120"/>
+              </a:rPr>
+              <a:t>Keep one or two strong projects (with student permission) as exemplars for next year.</a:t>
+            </a:r>
+            <a:endParaRPr lang="en-US" sz="1200" dirty="0"/>
+          </a:p>
+        </p:txBody>
+      </p:sp>
+      <p:sp>
+        <p:nvSpPr>
+          <p:cNvPr id="5" name="Text 3"/>
+          <p:cNvSpPr/>
+          <p:nvPr/>
+        </p:nvSpPr>
+        <p:spPr>
+          <a:xfrm>
+            <a:off x="406301" y="4434929"/>
+            <a:ext cx="8498026" cy="213271"/>
+          </a:xfrm>
+          <a:prstGeom prst="rect">
+            <a:avLst/>
+          </a:prstGeom>
+          <a:noFill/>
+          <a:ln/>
+        </p:spPr>
+        <p:txBody>
+          <a:bodyPr wrap="square" lIns="0" tIns="0" rIns="0" bIns="0" rtlCol="0" anchor="t"/>
+          <a:lstStyle/>
+          <a:p>
+            <a:pPr algn="l" indent="0" marL="0">
+              <a:lnSpc>
+                <a:spcPts val="1680"/>
+              </a:lnSpc>
+              <a:spcBef>
+                <a:spcPts val="300"/>
+              </a:spcBef>
+              <a:spcAft>
+                <a:spcPts val="300"/>
+              </a:spcAft>
+              <a:buNone/>
+            </a:pPr>
+            <a:r>
+              <a:rPr lang="en-US" sz="1200" dirty="0">
+                <a:solidFill>
+                  <a:srgbClr val="1C2833"/>
+                </a:solidFill>
+                <a:latin typeface="Arial" pitchFamily="34" charset="0"/>
+                <a:ea typeface="Arial" pitchFamily="34" charset="-122"/>
+                <a:cs typeface="Arial" pitchFamily="34" charset="-120"/>
+              </a:rPr>
+              <a:t>Middle ·  · IKS Curriculum</a:t>
+            </a:r>
+            <a:endParaRPr lang="en-US" sz="1200" dirty="0"/>
+          </a:p>
+        </p:txBody>
+      </p:sp>
+    </p:spTree>
+  </p:cSld>
+  <p:clrMapOvr>
+    <a:masterClrMapping/>
+  </p:clrMapOvr>
+</p:sld>
+</file>
+
+<file path=ppt/slides/slide14.xml><?xml version="1.0" encoding="utf-8"?>
+<p:sld xmlns:a="http://schemas.openxmlformats.org/drawingml/2006/main" xmlns:r="http://schemas.openxmlformats.org/officeDocument/2006/relationships" xmlns:p="http://schemas.openxmlformats.org/presentationml/2006/main">
+  <p:cSld name="Slide 14">
+    <p:bg>
+      <p:bgPr>
+        <a:solidFill>
+          <a:srgbClr val="FFFFFF"/>
+        </a:solidFill>
+      </p:bgPr>
+    </p:bg>
+    <p:spTree>
+      <p:nvGrpSpPr>
+        <p:cNvPr id="1" name=""/>
+        <p:cNvGrpSpPr/>
+        <p:nvPr/>
+      </p:nvGrpSpPr>
+      <p:grpSpPr>
+        <a:xfrm>
+          <a:off x="0" y="0"/>
+          <a:ext cx="0" cy="0"/>
+          <a:chOff x="0" y="0"/>
+          <a:chExt cx="0" cy="0"/>
+        </a:xfrm>
+      </p:grpSpPr>
+      <p:sp>
+        <p:nvSpPr>
+          <p:cNvPr id="2" name="Text 0"/>
+          <p:cNvSpPr/>
+          <p:nvPr/>
+        </p:nvSpPr>
+        <p:spPr>
+          <a:xfrm>
+            <a:off x="0" y="0"/>
+            <a:ext cx="9144000" cy="101501"/>
+          </a:xfrm>
+          <a:prstGeom prst="rect">
+            <a:avLst/>
+          </a:prstGeom>
+          <a:solidFill>
+            <a:srgbClr val="277884"/>
+          </a:solidFill>
+          <a:ln/>
+        </p:spPr>
+        <p:txBody>
+          <a:bodyPr wrap="square" rtlCol="0" anchor="ctr"/>
+          <a:lstStyle/>
+          <a:p>
+            <a:pPr indent="0" marL="0">
+              <a:buNone/>
+            </a:pPr>
+            <a:endParaRPr lang="en-US" dirty="0"/>
+          </a:p>
+        </p:txBody>
+      </p:sp>
+      <p:sp>
+        <p:nvSpPr>
+          <p:cNvPr id="3" name="Text 1"/>
+          <p:cNvSpPr/>
+          <p:nvPr/>
+        </p:nvSpPr>
+        <p:spPr>
+          <a:xfrm>
+            <a:off x="406301" y="457051"/>
+            <a:ext cx="8498026" cy="274290"/>
+          </a:xfrm>
+          <a:prstGeom prst="rect">
+            <a:avLst/>
+          </a:prstGeom>
+          <a:noFill/>
+          <a:ln/>
+        </p:spPr>
+        <p:txBody>
+          <a:bodyPr wrap="square" lIns="0" tIns="0" rIns="0" bIns="0" rtlCol="0" anchor="t"/>
+          <a:lstStyle/>
+          <a:p>
+            <a:pPr algn="l" indent="0" marL="0">
+              <a:lnSpc>
+                <a:spcPts val="2160"/>
+              </a:lnSpc>
+              <a:spcBef>
+                <a:spcPts val="600"/>
+              </a:spcBef>
+              <a:spcAft>
+                <a:spcPts val="800"/>
+              </a:spcAft>
+              <a:buNone/>
+            </a:pPr>
+            <a:r>
+              <a:rPr lang="en-US" sz="1800" b="1" dirty="0">
+                <a:solidFill>
+                  <a:srgbClr val="FE4447"/>
+                </a:solidFill>
+                <a:latin typeface="Georgia" pitchFamily="34" charset="0"/>
+                <a:ea typeface="Georgia" pitchFamily="34" charset="-122"/>
+                <a:cs typeface="Georgia" pitchFamily="34" charset="-120"/>
+              </a:rPr>
+              <a:t>Citation(s) used in this lesson</a:t>
+            </a:r>
+            <a:endParaRPr lang="en-US" sz="1800" dirty="0"/>
+          </a:p>
+        </p:txBody>
+      </p:sp>
+      <p:sp>
+        <p:nvSpPr>
+          <p:cNvPr id="4" name="Text 2"/>
+          <p:cNvSpPr/>
+          <p:nvPr/>
+        </p:nvSpPr>
+        <p:spPr>
+          <a:xfrm>
+            <a:off x="634901" y="883593"/>
+            <a:ext cx="8102798" cy="281880"/>
+          </a:xfrm>
+          <a:prstGeom prst="rect">
+            <a:avLst/>
+          </a:prstGeom>
+          <a:noFill/>
+          <a:ln/>
+        </p:spPr>
+        <p:txBody>
+          <a:bodyPr wrap="square" lIns="0" tIns="0" rIns="0" bIns="0" rtlCol="0" anchor="t"/>
+          <a:lstStyle/>
+          <a:p>
+            <a:pPr algn="l" marL="342900" indent="-342900">
+              <a:lnSpc>
+                <a:spcPts val="1620"/>
+              </a:lnSpc>
+              <a:spcAft>
+                <a:spcPts val="300"/>
+              </a:spcAft>
+              <a:buSzPct val="100000"/>
+              <a:buChar char="•"/>
+            </a:pPr>
+            <a:r>
+              <a:rPr lang="en-US" sz="1200" dirty="0">
+                <a:solidFill>
+                  <a:srgbClr val="1C2833"/>
+                </a:solidFill>
+                <a:latin typeface="Arial" pitchFamily="34" charset="0"/>
+                <a:ea typeface="Arial" pitchFamily="34" charset="-122"/>
+                <a:cs typeface="Arial" pitchFamily="34" charset="-120"/>
+              </a:rPr>
+              <a:t>N/A — this is assessment day.</a:t>
             </a:r>
             <a:endParaRPr lang="en-US" sz="1200" dirty="0"/>
           </a:p>
@@ -3020,7 +3893,7 @@
                 <a:ea typeface="Georgia" pitchFamily="34" charset="-122"/>
                 <a:cs typeface="Georgia" pitchFamily="34" charset="-120"/>
               </a:rPr>
-              <a:t>Materials</a:t>
+              <a:t>Learning objective</a:t>
             </a:r>
             <a:endParaRPr lang="en-US" sz="1800" dirty="0"/>
           </a:p>
@@ -3035,7 +3908,7 @@
         <p:spPr>
           <a:xfrm>
             <a:off x="406301" y="870942"/>
-            <a:ext cx="8498026" cy="445591"/>
+            <a:ext cx="8498026" cy="426541"/>
           </a:xfrm>
           <a:prstGeom prst="rect">
             <a:avLst/>
@@ -3068,99 +3941,7 @@
                 <a:ea typeface="Arial" pitchFamily="34" charset="-122"/>
                 <a:cs typeface="Arial" pitchFamily="34" charset="-120"/>
               </a:rPr>
-              <a:t>– Printed summative quiz (</a:t>
-            </a:r>
-            <a:pPr algn="l" indent="0" marL="0">
-              <a:lnSpc>
-                <a:spcPts val="1680"/>
-              </a:lnSpc>
-              <a:spcBef>
-                <a:spcPts val="300"/>
-              </a:spcBef>
-              <a:spcAft>
-                <a:spcPts val="300"/>
-              </a:spcAft>
-              <a:buNone/>
-            </a:pPr>
-            <a:r>
-              <a:rPr lang="en-US" sz="1200" dirty="0">
-                <a:solidFill>
-                  <a:srgbClr val="1C2833"/>
-                </a:solidFill>
-                <a:latin typeface="Arial" pitchFamily="34" charset="0"/>
-                <a:ea typeface="Arial" pitchFamily="34" charset="-122"/>
-                <a:cs typeface="Arial" pitchFamily="34" charset="-120"/>
-              </a:rPr>
-              <a:t>quizzes/summative.md</a:t>
-            </a:r>
-            <a:pPr algn="l" indent="0" marL="0">
-              <a:lnSpc>
-                <a:spcPts val="1680"/>
-              </a:lnSpc>
-              <a:spcBef>
-                <a:spcPts val="300"/>
-              </a:spcBef>
-              <a:spcAft>
-                <a:spcPts val="300"/>
-              </a:spcAft>
-              <a:buNone/>
-            </a:pPr>
-            <a:r>
-              <a:rPr lang="en-US" sz="1200" dirty="0">
-                <a:solidFill>
-                  <a:srgbClr val="1C2833"/>
-                </a:solidFill>
-                <a:latin typeface="Arial" pitchFamily="34" charset="0"/>
-                <a:ea typeface="Arial" pitchFamily="34" charset="-122"/>
-                <a:cs typeface="Arial" pitchFamily="34" charset="-120"/>
-              </a:rPr>
-              <a:t>) — one per student – All projects ready to present – A visible timer (phone, stopwatch) – The rubric (</a:t>
-            </a:r>
-            <a:pPr algn="l" indent="0" marL="0">
-              <a:lnSpc>
-                <a:spcPts val="1680"/>
-              </a:lnSpc>
-              <a:spcBef>
-                <a:spcPts val="300"/>
-              </a:spcBef>
-              <a:spcAft>
-                <a:spcPts val="300"/>
-              </a:spcAft>
-              <a:buNone/>
-            </a:pPr>
-            <a:r>
-              <a:rPr lang="en-US" sz="1200" dirty="0">
-                <a:solidFill>
-                  <a:srgbClr val="1C2833"/>
-                </a:solidFill>
-                <a:latin typeface="Arial" pitchFamily="34" charset="0"/>
-                <a:ea typeface="Arial" pitchFamily="34" charset="-122"/>
-                <a:cs typeface="Arial" pitchFamily="34" charset="-120"/>
-              </a:rPr>
-              <a:t>assessments/rubric.md</a:t>
-            </a:r>
-            <a:pPr algn="l" indent="0" marL="0">
-              <a:lnSpc>
-                <a:spcPts val="1680"/>
-              </a:lnSpc>
-              <a:spcBef>
-                <a:spcPts val="300"/>
-              </a:spcBef>
-              <a:spcAft>
-                <a:spcPts val="300"/>
-              </a:spcAft>
-              <a:buNone/>
-            </a:pPr>
-            <a:r>
-              <a:rPr lang="en-US" sz="1200" dirty="0">
-                <a:solidFill>
-                  <a:srgbClr val="1C2833"/>
-                </a:solidFill>
-                <a:latin typeface="Arial" pitchFamily="34" charset="0"/>
-                <a:ea typeface="Arial" pitchFamily="34" charset="-122"/>
-                <a:cs typeface="Arial" pitchFamily="34" charset="-120"/>
-              </a:rPr>
-              <a:t>) for marking</a:t>
+              <a:t>Students demonstrate the module's full set of objectives through a summative quiz, and present their projects in 3 minutes per pair to the class.</a:t>
             </a:r>
             <a:endParaRPr lang="en-US" sz="1200" dirty="0"/>
           </a:p>
@@ -3318,7 +4099,7 @@
                 <a:ea typeface="Georgia" pitchFamily="34" charset="-122"/>
                 <a:cs typeface="Georgia" pitchFamily="34" charset="-120"/>
               </a:rPr>
-              <a:t>Lesson flow</a:t>
+              <a:t>Materials</a:t>
             </a:r>
             <a:endParaRPr lang="en-US" sz="1800" dirty="0"/>
           </a:p>
@@ -3327,6 +4108,204 @@
       <p:sp>
         <p:nvSpPr>
           <p:cNvPr id="4" name="Text 2"/>
+          <p:cNvSpPr/>
+          <p:nvPr/>
+        </p:nvSpPr>
+        <p:spPr>
+          <a:xfrm>
+            <a:off x="634901" y="883593"/>
+            <a:ext cx="8102798" cy="1051322"/>
+          </a:xfrm>
+          <a:prstGeom prst="rect">
+            <a:avLst/>
+          </a:prstGeom>
+          <a:noFill/>
+          <a:ln/>
+        </p:spPr>
+        <p:txBody>
+          <a:bodyPr wrap="square" lIns="0" tIns="0" rIns="0" bIns="0" rtlCol="0" anchor="t"/>
+          <a:lstStyle/>
+          <a:p>
+            <a:pPr algn="l" marL="342900" indent="-342900">
+              <a:lnSpc>
+                <a:spcPts val="1620"/>
+              </a:lnSpc>
+              <a:spcAft>
+                <a:spcPts val="300"/>
+              </a:spcAft>
+              <a:buSzPct val="100000"/>
+              <a:buChar char="•"/>
+            </a:pPr>
+            <a:r>
+              <a:rPr lang="en-US" sz="1200" dirty="0">
+                <a:solidFill>
+                  <a:srgbClr val="1C2833"/>
+                </a:solidFill>
+                <a:latin typeface="Arial" pitchFamily="34" charset="0"/>
+                <a:ea typeface="Arial" pitchFamily="34" charset="-122"/>
+                <a:cs typeface="Arial" pitchFamily="34" charset="-120"/>
+              </a:rPr>
+              <a:t>Printed summative quiz (</a:t>
+            </a:r>
+            <a:pPr algn="l" indent="0" marL="0">
+              <a:lnSpc>
+                <a:spcPts val="1620"/>
+              </a:lnSpc>
+              <a:spcAft>
+                <a:spcPts val="300"/>
+              </a:spcAft>
+              <a:buNone/>
+            </a:pPr>
+            <a:r>
+              <a:rPr lang="en-US" sz="1200" dirty="0">
+                <a:solidFill>
+                  <a:srgbClr val="1C2833"/>
+                </a:solidFill>
+                <a:latin typeface="Arial" pitchFamily="34" charset="0"/>
+                <a:ea typeface="Arial" pitchFamily="34" charset="-122"/>
+                <a:cs typeface="Arial" pitchFamily="34" charset="-120"/>
+              </a:rPr>
+              <a:t>quizzes/summative.md</a:t>
+            </a:r>
+            <a:pPr algn="l" indent="0" marL="0">
+              <a:lnSpc>
+                <a:spcPts val="1620"/>
+              </a:lnSpc>
+              <a:spcAft>
+                <a:spcPts val="300"/>
+              </a:spcAft>
+              <a:buNone/>
+            </a:pPr>
+            <a:r>
+              <a:rPr lang="en-US" sz="1200" dirty="0">
+                <a:solidFill>
+                  <a:srgbClr val="1C2833"/>
+                </a:solidFill>
+                <a:latin typeface="Arial" pitchFamily="34" charset="0"/>
+                <a:ea typeface="Arial" pitchFamily="34" charset="-122"/>
+                <a:cs typeface="Arial" pitchFamily="34" charset="-120"/>
+              </a:rPr>
+              <a:t>) — one per student</a:t>
+            </a:r>
+            <a:endParaRPr lang="en-US" sz="1200" dirty="0"/>
+          </a:p>
+          <a:p>
+            <a:pPr algn="l" marL="342900" indent="-342900">
+              <a:lnSpc>
+                <a:spcPts val="1620"/>
+              </a:lnSpc>
+              <a:spcAft>
+                <a:spcPts val="300"/>
+              </a:spcAft>
+              <a:buSzPct val="100000"/>
+              <a:buChar char="•"/>
+            </a:pPr>
+            <a:r>
+              <a:rPr lang="en-US" sz="1200" dirty="0">
+                <a:solidFill>
+                  <a:srgbClr val="1C2833"/>
+                </a:solidFill>
+                <a:latin typeface="Arial" pitchFamily="34" charset="0"/>
+                <a:ea typeface="Arial" pitchFamily="34" charset="-122"/>
+                <a:cs typeface="Arial" pitchFamily="34" charset="-120"/>
+              </a:rPr>
+              <a:t>All projects ready to present</a:t>
+            </a:r>
+            <a:endParaRPr lang="en-US" sz="1200" dirty="0"/>
+          </a:p>
+          <a:p>
+            <a:pPr algn="l" marL="342900" indent="-342900">
+              <a:lnSpc>
+                <a:spcPts val="1620"/>
+              </a:lnSpc>
+              <a:spcAft>
+                <a:spcPts val="300"/>
+              </a:spcAft>
+              <a:buSzPct val="100000"/>
+              <a:buChar char="•"/>
+            </a:pPr>
+            <a:r>
+              <a:rPr lang="en-US" sz="1200" dirty="0">
+                <a:solidFill>
+                  <a:srgbClr val="1C2833"/>
+                </a:solidFill>
+                <a:latin typeface="Arial" pitchFamily="34" charset="0"/>
+                <a:ea typeface="Arial" pitchFamily="34" charset="-122"/>
+                <a:cs typeface="Arial" pitchFamily="34" charset="-120"/>
+              </a:rPr>
+              <a:t>A visible timer (phone, stopwatch)</a:t>
+            </a:r>
+            <a:endParaRPr lang="en-US" sz="1200" dirty="0"/>
+          </a:p>
+          <a:p>
+            <a:pPr algn="l" marL="342900" indent="-342900">
+              <a:lnSpc>
+                <a:spcPts val="1620"/>
+              </a:lnSpc>
+              <a:spcAft>
+                <a:spcPts val="300"/>
+              </a:spcAft>
+              <a:buSzPct val="100000"/>
+              <a:buChar char="•"/>
+            </a:pPr>
+            <a:r>
+              <a:rPr lang="en-US" sz="1200" dirty="0">
+                <a:solidFill>
+                  <a:srgbClr val="1C2833"/>
+                </a:solidFill>
+                <a:latin typeface="Arial" pitchFamily="34" charset="0"/>
+                <a:ea typeface="Arial" pitchFamily="34" charset="-122"/>
+                <a:cs typeface="Arial" pitchFamily="34" charset="-120"/>
+              </a:rPr>
+              <a:t>The rubric (</a:t>
+            </a:r>
+            <a:pPr algn="l" indent="0" marL="0">
+              <a:lnSpc>
+                <a:spcPts val="1620"/>
+              </a:lnSpc>
+              <a:spcAft>
+                <a:spcPts val="300"/>
+              </a:spcAft>
+              <a:buNone/>
+            </a:pPr>
+            <a:r>
+              <a:rPr lang="en-US" sz="1200" dirty="0">
+                <a:solidFill>
+                  <a:srgbClr val="1C2833"/>
+                </a:solidFill>
+                <a:latin typeface="Arial" pitchFamily="34" charset="0"/>
+                <a:ea typeface="Arial" pitchFamily="34" charset="-122"/>
+                <a:cs typeface="Arial" pitchFamily="34" charset="-120"/>
+              </a:rPr>
+              <a:t>assessments/rubric.md</a:t>
+            </a:r>
+            <a:pPr algn="l" indent="0" marL="0">
+              <a:lnSpc>
+                <a:spcPts val="1620"/>
+              </a:lnSpc>
+              <a:spcAft>
+                <a:spcPts val="300"/>
+              </a:spcAft>
+              <a:buNone/>
+            </a:pPr>
+            <a:r>
+              <a:rPr lang="en-US" sz="1200" dirty="0">
+                <a:solidFill>
+                  <a:srgbClr val="1C2833"/>
+                </a:solidFill>
+                <a:latin typeface="Arial" pitchFamily="34" charset="0"/>
+                <a:ea typeface="Arial" pitchFamily="34" charset="-122"/>
+                <a:cs typeface="Arial" pitchFamily="34" charset="-120"/>
+              </a:rPr>
+              <a:t>) for marking</a:t>
+            </a:r>
+            <a:endParaRPr lang="en-US" sz="1200" dirty="0"/>
+          </a:p>
+        </p:txBody>
+      </p:sp>
+      <p:sp>
+        <p:nvSpPr>
+          <p:cNvPr id="5" name="Text 3"/>
           <p:cNvSpPr/>
           <p:nvPr/>
         </p:nvSpPr>
@@ -3476,7 +4455,7 @@
                 <a:ea typeface="Georgia" pitchFamily="34" charset="-122"/>
                 <a:cs typeface="Georgia" pitchFamily="34" charset="-120"/>
               </a:rPr>
-              <a:t>Warm-up (3 min)</a:t>
+              <a:t>Lesson flow</a:t>
             </a:r>
             <a:endParaRPr lang="en-US" sz="1800" dirty="0"/>
           </a:p>
@@ -3485,146 +4464,6 @@
       <p:sp>
         <p:nvSpPr>
           <p:cNvPr id="4" name="Text 2"/>
-          <p:cNvSpPr/>
-          <p:nvPr/>
-        </p:nvSpPr>
-        <p:spPr>
-          <a:xfrm>
-            <a:off x="406301" y="870942"/>
-            <a:ext cx="8498026" cy="213271"/>
-          </a:xfrm>
-          <a:prstGeom prst="rect">
-            <a:avLst/>
-          </a:prstGeom>
-          <a:noFill/>
-          <a:ln/>
-        </p:spPr>
-        <p:txBody>
-          <a:bodyPr wrap="square" lIns="0" tIns="0" rIns="0" bIns="0" rtlCol="0" anchor="t"/>
-          <a:lstStyle/>
-          <a:p>
-            <a:pPr algn="l" indent="0" marL="0">
-              <a:lnSpc>
-                <a:spcPts val="1680"/>
-              </a:lnSpc>
-              <a:spcBef>
-                <a:spcPts val="300"/>
-              </a:spcBef>
-              <a:spcAft>
-                <a:spcPts val="300"/>
-              </a:spcAft>
-              <a:buNone/>
-            </a:pPr>
-            <a:r>
-              <a:rPr lang="en-US" sz="1200" dirty="0">
-                <a:solidFill>
-                  <a:srgbClr val="1C2833"/>
-                </a:solidFill>
-                <a:latin typeface="Arial" pitchFamily="34" charset="0"/>
-                <a:ea typeface="Arial" pitchFamily="34" charset="-122"/>
-                <a:cs typeface="Arial" pitchFamily="34" charset="-120"/>
-              </a:rPr>
-              <a:t>– Daily prompt: </a:t>
-            </a:r>
-            <a:pPr algn="l" indent="0" marL="0">
-              <a:lnSpc>
-                <a:spcPts val="1680"/>
-              </a:lnSpc>
-              <a:spcBef>
-                <a:spcPts val="300"/>
-              </a:spcBef>
-              <a:spcAft>
-                <a:spcPts val="300"/>
-              </a:spcAft>
-              <a:buNone/>
-            </a:pPr>
-            <a:r>
-              <a:rPr lang="en-US" sz="1200" i="1" dirty="0">
-                <a:solidFill>
-                  <a:srgbClr val="1C2833"/>
-                </a:solidFill>
-                <a:latin typeface="Arial" pitchFamily="34" charset="0"/>
-                <a:ea typeface="Arial" pitchFamily="34" charset="-122"/>
-                <a:cs typeface="Arial" pitchFamily="34" charset="-120"/>
-              </a:rPr>
-              <a:t>"Did you see the Moon last night? What tithi?"</a:t>
-            </a:r>
-            <a:pPr algn="l" indent="0" marL="0">
-              <a:lnSpc>
-                <a:spcPts val="1680"/>
-              </a:lnSpc>
-              <a:spcBef>
-                <a:spcPts val="300"/>
-              </a:spcBef>
-              <a:spcAft>
-                <a:spcPts val="300"/>
-              </a:spcAft>
-              <a:buNone/>
-            </a:pPr>
-            <a:r>
-              <a:rPr lang="en-US" sz="1200" dirty="0">
-                <a:solidFill>
-                  <a:srgbClr val="1C2833"/>
-                </a:solidFill>
-                <a:latin typeface="Arial" pitchFamily="34" charset="0"/>
-                <a:ea typeface="Arial" pitchFamily="34" charset="-122"/>
-                <a:cs typeface="Arial" pitchFamily="34" charset="-120"/>
-              </a:rPr>
-              <a:t> — 2 students share. (Last time for the diary prompt.)</a:t>
-            </a:r>
-            <a:endParaRPr lang="en-US" sz="1200" dirty="0"/>
-          </a:p>
-        </p:txBody>
-      </p:sp>
-      <p:sp>
-        <p:nvSpPr>
-          <p:cNvPr id="5" name="Text 3"/>
-          <p:cNvSpPr/>
-          <p:nvPr/>
-        </p:nvSpPr>
-        <p:spPr>
-          <a:xfrm>
-            <a:off x="634901" y="1173063"/>
-            <a:ext cx="8102798" cy="281880"/>
-          </a:xfrm>
-          <a:prstGeom prst="rect">
-            <a:avLst/>
-          </a:prstGeom>
-          <a:noFill/>
-          <a:ln/>
-        </p:spPr>
-        <p:txBody>
-          <a:bodyPr wrap="square" lIns="0" tIns="0" rIns="0" bIns="0" rtlCol="0" anchor="t"/>
-          <a:lstStyle/>
-          <a:p>
-            <a:pPr algn="l" marL="342900" indent="-342900">
-              <a:lnSpc>
-                <a:spcPts val="1620"/>
-              </a:lnSpc>
-              <a:spcAft>
-                <a:spcPts val="300"/>
-              </a:spcAft>
-              <a:buSzPct val="100000"/>
-              <a:buChar char="•"/>
-            </a:pPr>
-            <a:r>
-              <a:rPr lang="en-US" sz="1200" i="1" dirty="0">
-                <a:solidFill>
-                  <a:srgbClr val="1C2833"/>
-                </a:solidFill>
-                <a:latin typeface="Arial" pitchFamily="34" charset="0"/>
-                <a:ea typeface="Arial" pitchFamily="34" charset="-122"/>
-                <a:cs typeface="Arial" pitchFamily="34" charset="-120"/>
-              </a:rPr>
-              <a:t>"Two things today — quiz first, then the showcase. Pencils ready."</a:t>
-            </a:r>
-            <a:endParaRPr lang="en-US" sz="1200" dirty="0"/>
-          </a:p>
-        </p:txBody>
-      </p:sp>
-      <p:sp>
-        <p:nvSpPr>
-          <p:cNvPr id="6" name="Text 4"/>
           <p:cNvSpPr/>
           <p:nvPr/>
         </p:nvSpPr>
@@ -3774,7 +4613,7 @@
                 <a:ea typeface="Georgia" pitchFamily="34" charset="-122"/>
                 <a:cs typeface="Georgia" pitchFamily="34" charset="-120"/>
               </a:rPr>
-              <a:t>Summative quiz (20 min)</a:t>
+              <a:t>Warm-up (3 min)</a:t>
             </a:r>
             <a:endParaRPr lang="en-US" sz="1800" dirty="0"/>
           </a:p>
@@ -3788,8 +4627,8 @@
         </p:nvSpPr>
         <p:spPr>
           <a:xfrm>
-            <a:off x="406301" y="870942"/>
-            <a:ext cx="8498026" cy="426541"/>
+            <a:off x="634901" y="883593"/>
+            <a:ext cx="8102798" cy="525661"/>
           </a:xfrm>
           <a:prstGeom prst="rect">
             <a:avLst/>
@@ -3801,17 +4640,15 @@
           <a:bodyPr wrap="square" lIns="0" tIns="0" rIns="0" bIns="0" rtlCol="0" anchor="t"/>
           <a:lstStyle/>
           <a:p>
-            <a:pPr algn="l" indent="0" marL="0">
-              <a:lnSpc>
-                <a:spcPts val="1680"/>
-              </a:lnSpc>
-              <a:spcBef>
-                <a:spcPts val="300"/>
-              </a:spcBef>
-              <a:spcAft>
-                <a:spcPts val="300"/>
-              </a:spcAft>
-              <a:buNone/>
+            <a:pPr algn="l" marL="342900" indent="-342900">
+              <a:lnSpc>
+                <a:spcPts val="1620"/>
+              </a:lnSpc>
+              <a:spcAft>
+                <a:spcPts val="300"/>
+              </a:spcAft>
+              <a:buSzPct val="100000"/>
+              <a:buChar char="•"/>
             </a:pPr>
             <a:r>
               <a:rPr lang="en-US" sz="1200" dirty="0">
@@ -3822,7 +4659,71 @@
                 <a:ea typeface="Arial" pitchFamily="34" charset="-122"/>
                 <a:cs typeface="Arial" pitchFamily="34" charset="-120"/>
               </a:rPr>
-              <a:t>– Distribute the quiz. – 20 minutes, closed book, individual. – Strict silence after the start signal. – Collect at end. Mark over the weekend.</a:t>
+              <a:t>Daily prompt: </a:t>
+            </a:r>
+            <a:pPr algn="l" indent="0" marL="0">
+              <a:lnSpc>
+                <a:spcPts val="1620"/>
+              </a:lnSpc>
+              <a:spcAft>
+                <a:spcPts val="300"/>
+              </a:spcAft>
+              <a:buNone/>
+            </a:pPr>
+            <a:r>
+              <a:rPr lang="en-US" sz="1200" i="1" dirty="0">
+                <a:solidFill>
+                  <a:srgbClr val="1C2833"/>
+                </a:solidFill>
+                <a:latin typeface="Arial" pitchFamily="34" charset="0"/>
+                <a:ea typeface="Arial" pitchFamily="34" charset="-122"/>
+                <a:cs typeface="Arial" pitchFamily="34" charset="-120"/>
+              </a:rPr>
+              <a:t>"Did you see the Moon last night? What tithi?"</a:t>
+            </a:r>
+            <a:pPr algn="l" indent="0" marL="0">
+              <a:lnSpc>
+                <a:spcPts val="1620"/>
+              </a:lnSpc>
+              <a:spcAft>
+                <a:spcPts val="300"/>
+              </a:spcAft>
+              <a:buNone/>
+            </a:pPr>
+            <a:r>
+              <a:rPr lang="en-US" sz="1200" dirty="0">
+                <a:solidFill>
+                  <a:srgbClr val="1C2833"/>
+                </a:solidFill>
+                <a:latin typeface="Arial" pitchFamily="34" charset="0"/>
+                <a:ea typeface="Arial" pitchFamily="34" charset="-122"/>
+                <a:cs typeface="Arial" pitchFamily="34" charset="-120"/>
+              </a:rPr>
+              <a:t> — 2 students share. (Last time for the diary prompt.)</a:t>
+            </a:r>
+            <a:endParaRPr lang="en-US" sz="1200" dirty="0"/>
+          </a:p>
+          <a:p>
+            <a:pPr algn="l" marL="342900" indent="-342900">
+              <a:lnSpc>
+                <a:spcPts val="1620"/>
+              </a:lnSpc>
+              <a:spcAft>
+                <a:spcPts val="300"/>
+              </a:spcAft>
+              <a:buSzPct val="100000"/>
+              <a:buChar char="•"/>
+            </a:pPr>
+            <a:r>
+              <a:rPr lang="en-US" sz="1200" i="1" dirty="0">
+                <a:solidFill>
+                  <a:srgbClr val="1C2833"/>
+                </a:solidFill>
+                <a:latin typeface="Arial" pitchFamily="34" charset="0"/>
+                <a:ea typeface="Arial" pitchFamily="34" charset="-122"/>
+                <a:cs typeface="Arial" pitchFamily="34" charset="-120"/>
+              </a:rPr>
+              <a:t>"Two things today — quiz first, then the showcase. Pencils ready."</a:t>
             </a:r>
             <a:endParaRPr lang="en-US" sz="1200" dirty="0"/>
           </a:p>
@@ -3980,7 +4881,7 @@
                 <a:ea typeface="Georgia" pitchFamily="34" charset="-122"/>
                 <a:cs typeface="Georgia" pitchFamily="34" charset="-120"/>
               </a:rPr>
-              <a:t>Showcase (20 min)</a:t>
+              <a:t>Summative quiz (20 min)</a:t>
             </a:r>
             <a:endParaRPr lang="en-US" sz="1800" dirty="0"/>
           </a:p>
@@ -3994,8 +4895,8 @@
         </p:nvSpPr>
         <p:spPr>
           <a:xfrm>
-            <a:off x="406301" y="870942"/>
-            <a:ext cx="8498026" cy="426541"/>
+            <a:off x="634901" y="883593"/>
+            <a:ext cx="8102798" cy="1013222"/>
           </a:xfrm>
           <a:prstGeom prst="rect">
             <a:avLst/>
@@ -4007,17 +4908,15 @@
           <a:bodyPr wrap="square" lIns="0" tIns="0" rIns="0" bIns="0" rtlCol="0" anchor="t"/>
           <a:lstStyle/>
           <a:p>
-            <a:pPr algn="l" indent="0" marL="0">
-              <a:lnSpc>
-                <a:spcPts val="1680"/>
-              </a:lnSpc>
-              <a:spcBef>
-                <a:spcPts val="300"/>
-              </a:spcBef>
-              <a:spcAft>
-                <a:spcPts val="300"/>
-              </a:spcAft>
-              <a:buNone/>
+            <a:pPr algn="l" marL="342900" indent="-342900">
+              <a:lnSpc>
+                <a:spcPts val="1620"/>
+              </a:lnSpc>
+              <a:spcAft>
+                <a:spcPts val="300"/>
+              </a:spcAft>
+              <a:buSzPct val="100000"/>
+              <a:buChar char="•"/>
             </a:pPr>
             <a:r>
               <a:rPr lang="en-US" sz="1200" dirty="0">
@@ -4028,44 +4927,20 @@
                 <a:ea typeface="Arial" pitchFamily="34" charset="-122"/>
                 <a:cs typeface="Arial" pitchFamily="34" charset="-120"/>
               </a:rPr>
-              <a:t>– Pairs present in turn — 3 minutes each + 1 minute Q&amp;A. – Visible timer running. Strict cutoff at 3:30. – Teacher marks on the rubric in real time. – Audience: students take notes — what's one fact they didn't know, from each pair?</a:t>
+              <a:t>Distribute the quiz.</a:t>
             </a:r>
             <a:endParaRPr lang="en-US" sz="1200" dirty="0"/>
           </a:p>
-        </p:txBody>
-      </p:sp>
-      <p:sp>
-        <p:nvSpPr>
-          <p:cNvPr id="5" name="Text 3"/>
-          <p:cNvSpPr/>
-          <p:nvPr/>
-        </p:nvSpPr>
-        <p:spPr>
-          <a:xfrm>
-            <a:off x="406301" y="1373684"/>
-            <a:ext cx="8498026" cy="426541"/>
-          </a:xfrm>
-          <a:prstGeom prst="rect">
-            <a:avLst/>
-          </a:prstGeom>
-          <a:noFill/>
-          <a:ln/>
-        </p:spPr>
-        <p:txBody>
-          <a:bodyPr wrap="square" lIns="0" tIns="0" rIns="0" bIns="0" rtlCol="0" anchor="t"/>
-          <a:lstStyle/>
-          <a:p>
-            <a:pPr algn="l" indent="0" marL="0">
-              <a:lnSpc>
-                <a:spcPts val="1680"/>
-              </a:lnSpc>
-              <a:spcBef>
-                <a:spcPts val="300"/>
-              </a:spcBef>
-              <a:spcAft>
-                <a:spcPts val="300"/>
-              </a:spcAft>
-              <a:buNone/>
+          <a:p>
+            <a:pPr algn="l" marL="342900" indent="-342900">
+              <a:lnSpc>
+                <a:spcPts val="1620"/>
+              </a:lnSpc>
+              <a:spcAft>
+                <a:spcPts val="300"/>
+              </a:spcAft>
+              <a:buSzPct val="100000"/>
+              <a:buChar char="•"/>
             </a:pPr>
             <a:r>
               <a:rPr lang="en-US" sz="1200" dirty="0">
@@ -4076,22 +4951,23 @@
                 <a:ea typeface="Arial" pitchFamily="34" charset="-122"/>
                 <a:cs typeface="Arial" pitchFamily="34" charset="-120"/>
               </a:rPr>
-              <a:t>(For a class of 30 students = 15 pairs, this won't fit in 20 minutes. </a:t>
-            </a:r>
-            <a:pPr algn="l" indent="0" marL="0">
-              <a:lnSpc>
-                <a:spcPts val="1680"/>
-              </a:lnSpc>
-              <a:spcBef>
-                <a:spcPts val="300"/>
-              </a:spcBef>
-              <a:spcAft>
-                <a:spcPts val="300"/>
-              </a:spcAft>
-              <a:buNone/>
-            </a:pPr>
-            <a:r>
-              <a:rPr lang="en-US" sz="1200" b="1" dirty="0">
+              <a:t>20 minutes, closed book, individual.</a:t>
+            </a:r>
+            <a:endParaRPr lang="en-US" sz="1200" dirty="0"/>
+          </a:p>
+          <a:p>
+            <a:pPr algn="l" marL="342900" indent="-342900">
+              <a:lnSpc>
+                <a:spcPts val="1620"/>
+              </a:lnSpc>
+              <a:spcAft>
+                <a:spcPts val="300"/>
+              </a:spcAft>
+              <a:buSzPct val="100000"/>
+              <a:buChar char="•"/>
+            </a:pPr>
+            <a:r>
+              <a:rPr lang="en-US" sz="1200" dirty="0">
                 <a:solidFill>
                   <a:srgbClr val="1C2833"/>
                 </a:solidFill>
@@ -4099,19 +4975,20 @@
                 <a:ea typeface="Arial" pitchFamily="34" charset="-122"/>
                 <a:cs typeface="Arial" pitchFamily="34" charset="-120"/>
               </a:rPr>
-              <a:t>Either split presentations across Day 9 and Day 10, or schedule a separate showcase session.</a:t>
-            </a:r>
-            <a:pPr algn="l" indent="0" marL="0">
-              <a:lnSpc>
-                <a:spcPts val="1680"/>
-              </a:lnSpc>
-              <a:spcBef>
-                <a:spcPts val="300"/>
-              </a:spcBef>
-              <a:spcAft>
-                <a:spcPts val="300"/>
-              </a:spcAft>
-              <a:buNone/>
+              <a:t>Strict silence after the start signal.</a:t>
+            </a:r>
+            <a:endParaRPr lang="en-US" sz="1200" dirty="0"/>
+          </a:p>
+          <a:p>
+            <a:pPr algn="l" marL="342900" indent="-342900">
+              <a:lnSpc>
+                <a:spcPts val="1620"/>
+              </a:lnSpc>
+              <a:spcAft>
+                <a:spcPts val="300"/>
+              </a:spcAft>
+              <a:buSzPct val="100000"/>
+              <a:buChar char="•"/>
             </a:pPr>
             <a:r>
               <a:rPr lang="en-US" sz="1200" dirty="0">
@@ -4122,7 +4999,7 @@
                 <a:ea typeface="Arial" pitchFamily="34" charset="-122"/>
                 <a:cs typeface="Arial" pitchFamily="34" charset="-120"/>
               </a:rPr>
-              <a:t> See the lesson-plan note.)</a:t>
+              <a:t>Collect at end. Mark over the weekend.</a:t>
             </a:r>
             <a:endParaRPr lang="en-US" sz="1200" dirty="0"/>
           </a:p>
@@ -4130,7 +5007,7 @@
       </p:sp>
       <p:sp>
         <p:nvSpPr>
-          <p:cNvPr id="6" name="Text 4"/>
+          <p:cNvPr id="5" name="Text 3"/>
           <p:cNvSpPr/>
           <p:nvPr/>
         </p:nvSpPr>
@@ -4280,7 +5157,7 @@
                 <a:ea typeface="Georgia" pitchFamily="34" charset="-122"/>
                 <a:cs typeface="Georgia" pitchFamily="34" charset="-120"/>
               </a:rPr>
-              <a:t>Wrap-up (2 min)</a:t>
+              <a:t>Showcase (20 min)</a:t>
             </a:r>
             <a:endParaRPr lang="en-US" sz="1800" dirty="0"/>
           </a:p>
@@ -4295,7 +5172,7 @@
         <p:spPr>
           <a:xfrm>
             <a:off x="634901" y="883593"/>
-            <a:ext cx="8102798" cy="487561"/>
+            <a:ext cx="8102798" cy="1013222"/>
           </a:xfrm>
           <a:prstGeom prst="rect">
             <a:avLst/>
@@ -4318,7 +5195,7 @@
               <a:buChar char="•"/>
             </a:pPr>
             <a:r>
-              <a:rPr lang="en-US" sz="1200" i="1" dirty="0">
+              <a:rPr lang="en-US" sz="1200" dirty="0">
                 <a:solidFill>
                   <a:srgbClr val="1C2833"/>
                 </a:solidFill>
@@ -4326,44 +5203,20 @@
                 <a:ea typeface="Arial" pitchFamily="34" charset="-122"/>
                 <a:cs typeface="Arial" pitchFamily="34" charset="-120"/>
               </a:rPr>
-              <a:t>"You've each kept a 10-night Moon diary. You've built a tithi calendar. You've explained eclipses. You've presented a project. Look up tonight — you'll see the Moon a little differently."</a:t>
+              <a:t>Pairs present in turn — 3 minutes each + 1 minute Q&amp;A.</a:t>
             </a:r>
             <a:endParaRPr lang="en-US" sz="1200" dirty="0"/>
           </a:p>
-        </p:txBody>
-      </p:sp>
-      <p:sp>
-        <p:nvSpPr>
-          <p:cNvPr id="5" name="Text 3"/>
-          <p:cNvSpPr/>
-          <p:nvPr/>
-        </p:nvSpPr>
-        <p:spPr>
-          <a:xfrm>
-            <a:off x="406301" y="1460004"/>
-            <a:ext cx="8498026" cy="213271"/>
-          </a:xfrm>
-          <a:prstGeom prst="rect">
-            <a:avLst/>
-          </a:prstGeom>
-          <a:noFill/>
-          <a:ln/>
-        </p:spPr>
-        <p:txBody>
-          <a:bodyPr wrap="square" lIns="0" tIns="0" rIns="0" bIns="0" rtlCol="0" anchor="t"/>
-          <a:lstStyle/>
-          <a:p>
-            <a:pPr algn="l" indent="0" marL="0">
-              <a:lnSpc>
-                <a:spcPts val="1680"/>
-              </a:lnSpc>
-              <a:spcBef>
-                <a:spcPts val="300"/>
-              </a:spcBef>
-              <a:spcAft>
-                <a:spcPts val="300"/>
-              </a:spcAft>
-              <a:buNone/>
+          <a:p>
+            <a:pPr algn="l" marL="342900" indent="-342900">
+              <a:lnSpc>
+                <a:spcPts val="1620"/>
+              </a:lnSpc>
+              <a:spcAft>
+                <a:spcPts val="300"/>
+              </a:spcAft>
+              <a:buSzPct val="100000"/>
+              <a:buChar char="•"/>
             </a:pPr>
             <a:r>
               <a:rPr lang="en-US" sz="1200" dirty="0">
@@ -4374,15 +5227,63 @@
                 <a:ea typeface="Arial" pitchFamily="34" charset="-122"/>
                 <a:cs typeface="Arial" pitchFamily="34" charset="-120"/>
               </a:rPr>
-              <a:t>– Reflection slips submitted with projects. – Collect Moon diaries.</a:t>
+              <a:t>Visible timer running. Strict cutoff at 3:30.</a:t>
             </a:r>
             <a:endParaRPr lang="en-US" sz="1200" dirty="0"/>
           </a:p>
-        </p:txBody>
-      </p:sp>
-      <p:sp>
-        <p:nvSpPr>
-          <p:cNvPr id="6" name="Text 4"/>
+          <a:p>
+            <a:pPr algn="l" marL="342900" indent="-342900">
+              <a:lnSpc>
+                <a:spcPts val="1620"/>
+              </a:lnSpc>
+              <a:spcAft>
+                <a:spcPts val="300"/>
+              </a:spcAft>
+              <a:buSzPct val="100000"/>
+              <a:buChar char="•"/>
+            </a:pPr>
+            <a:r>
+              <a:rPr lang="en-US" sz="1200" dirty="0">
+                <a:solidFill>
+                  <a:srgbClr val="1C2833"/>
+                </a:solidFill>
+                <a:latin typeface="Arial" pitchFamily="34" charset="0"/>
+                <a:ea typeface="Arial" pitchFamily="34" charset="-122"/>
+                <a:cs typeface="Arial" pitchFamily="34" charset="-120"/>
+              </a:rPr>
+              <a:t>Teacher marks on the rubric in real time.</a:t>
+            </a:r>
+            <a:endParaRPr lang="en-US" sz="1200" dirty="0"/>
+          </a:p>
+          <a:p>
+            <a:pPr algn="l" marL="342900" indent="-342900">
+              <a:lnSpc>
+                <a:spcPts val="1620"/>
+              </a:lnSpc>
+              <a:spcAft>
+                <a:spcPts val="300"/>
+              </a:spcAft>
+              <a:buSzPct val="100000"/>
+              <a:buChar char="•"/>
+            </a:pPr>
+            <a:r>
+              <a:rPr lang="en-US" sz="1200" dirty="0">
+                <a:solidFill>
+                  <a:srgbClr val="1C2833"/>
+                </a:solidFill>
+                <a:latin typeface="Arial" pitchFamily="34" charset="0"/>
+                <a:ea typeface="Arial" pitchFamily="34" charset="-122"/>
+                <a:cs typeface="Arial" pitchFamily="34" charset="-120"/>
+              </a:rPr>
+              <a:t>Audience: students take notes — what's one fact they didn't know, from each pair?</a:t>
+            </a:r>
+            <a:endParaRPr lang="en-US" sz="1200" dirty="0"/>
+          </a:p>
+        </p:txBody>
+      </p:sp>
+      <p:sp>
+        <p:nvSpPr>
+          <p:cNvPr id="5" name="Text 3"/>
           <p:cNvSpPr/>
           <p:nvPr/>
         </p:nvSpPr>
@@ -4532,7 +5433,7 @@
                 <a:ea typeface="Georgia" pitchFamily="34" charset="-122"/>
                 <a:cs typeface="Georgia" pitchFamily="34" charset="-120"/>
               </a:rPr>
-              <a:t>Student-facing content</a:t>
+              <a:t>Showcase (20 min) (cont.)</a:t>
             </a:r>
             <a:endParaRPr lang="en-US" sz="1800" dirty="0"/>
           </a:p>
@@ -4546,61 +5447,8 @@
         </p:nvSpPr>
         <p:spPr>
           <a:xfrm>
-            <a:off x="406301" y="883593"/>
-            <a:ext cx="8331398" cy="1381125"/>
-          </a:xfrm>
-          <a:prstGeom prst="rect">
-            <a:avLst/>
-          </a:prstGeom>
-          <a:solidFill>
-            <a:srgbClr val="F4F8F9"/>
-          </a:solidFill>
-          <a:ln/>
-        </p:spPr>
-        <p:txBody>
-          <a:bodyPr wrap="square" rtlCol="0" anchor="ctr"/>
-          <a:lstStyle/>
-          <a:p>
-            <a:pPr indent="0" marL="0">
-              <a:buNone/>
-            </a:pPr>
-            <a:endParaRPr lang="en-US" dirty="0"/>
-          </a:p>
-        </p:txBody>
-      </p:sp>
-      <p:sp>
-        <p:nvSpPr>
-          <p:cNvPr id="5" name="Shape 3"/>
-          <p:cNvSpPr/>
-          <p:nvPr/>
-        </p:nvSpPr>
-        <p:spPr>
-          <a:xfrm>
-            <a:off x="434876" y="883593"/>
-            <a:ext cx="0" cy="1381125"/>
-          </a:xfrm>
-          <a:prstGeom prst="line">
-            <a:avLst/>
-          </a:prstGeom>
-          <a:noFill/>
-          <a:ln w="57150">
-            <a:solidFill>
-              <a:srgbClr val="FE4447"/>
-            </a:solidFill>
-            <a:prstDash val="solid"/>
-          </a:ln>
-        </p:spPr>
-      </p:sp>
-      <p:sp>
-        <p:nvSpPr>
-          <p:cNvPr id="6" name="Text 4"/>
-          <p:cNvSpPr/>
-          <p:nvPr/>
-        </p:nvSpPr>
-        <p:spPr>
-          <a:xfrm>
-            <a:off x="692051" y="1074093"/>
-            <a:ext cx="7973389" cy="230981"/>
+            <a:off x="406301" y="870942"/>
+            <a:ext cx="8498026" cy="426541"/>
           </a:xfrm>
           <a:prstGeom prst="rect">
             <a:avLst/>
@@ -4614,7 +5462,7 @@
           <a:p>
             <a:pPr algn="l" indent="0" marL="0">
               <a:lnSpc>
-                <a:spcPts val="1820"/>
+                <a:spcPts val="1680"/>
               </a:lnSpc>
               <a:spcBef>
                 <a:spcPts val="300"/>
@@ -4625,44 +5473,19 @@
               <a:buNone/>
             </a:pPr>
             <a:r>
-              <a:rPr lang="en-US" sz="1300" b="1" i="1" dirty="0">
-                <a:solidFill>
-                  <a:srgbClr val="1C2833"/>
-                </a:solidFill>
-                <a:latin typeface="Georgia" pitchFamily="34" charset="0"/>
-                <a:ea typeface="Georgia" pitchFamily="34" charset="-122"/>
-                <a:cs typeface="Georgia" pitchFamily="34" charset="-120"/>
-              </a:rPr>
-              <a:t>Module complete.</a:t>
-            </a:r>
-            <a:endParaRPr lang="en-US" sz="1300" dirty="0"/>
-          </a:p>
-        </p:txBody>
-      </p:sp>
-      <p:sp>
-        <p:nvSpPr>
-          <p:cNvPr id="7" name="Text 5"/>
-          <p:cNvSpPr/>
-          <p:nvPr/>
-        </p:nvSpPr>
-        <p:spPr>
-          <a:xfrm>
-            <a:off x="692051" y="1343174"/>
-            <a:ext cx="7973389" cy="461963"/>
-          </a:xfrm>
-          <a:prstGeom prst="rect">
-            <a:avLst/>
-          </a:prstGeom>
-          <a:noFill/>
-          <a:ln/>
-        </p:spPr>
-        <p:txBody>
-          <a:bodyPr wrap="square" lIns="0" tIns="0" rIns="0" bIns="0" rtlCol="0" anchor="t"/>
-          <a:lstStyle/>
-          <a:p>
+              <a:rPr lang="en-US" sz="1200" dirty="0">
+                <a:solidFill>
+                  <a:srgbClr val="1C2833"/>
+                </a:solidFill>
+                <a:latin typeface="Arial" pitchFamily="34" charset="0"/>
+                <a:ea typeface="Arial" pitchFamily="34" charset="-122"/>
+                <a:cs typeface="Arial" pitchFamily="34" charset="-120"/>
+              </a:rPr>
+              <a:t>(For a class of 30 students = 15 pairs, this won't fit in 20 minutes. </a:t>
+            </a:r>
             <a:pPr algn="l" indent="0" marL="0">
               <a:lnSpc>
-                <a:spcPts val="1820"/>
+                <a:spcPts val="1680"/>
               </a:lnSpc>
               <a:spcBef>
                 <a:spcPts val="300"/>
@@ -4673,44 +5496,19 @@
               <a:buNone/>
             </a:pPr>
             <a:r>
-              <a:rPr lang="en-US" sz="1300" i="1" dirty="0">
-                <a:solidFill>
-                  <a:srgbClr val="1C2833"/>
-                </a:solidFill>
-                <a:latin typeface="Georgia" pitchFamily="34" charset="0"/>
-                <a:ea typeface="Georgia" pitchFamily="34" charset="-122"/>
-                <a:cs typeface="Georgia" pitchFamily="34" charset="-120"/>
-              </a:rPr>
-              <a:t>Today: 1. Summative quiz — 20 min, individual, closed book. 2. Showcase — 3 minutes per pair + 1-minute Q&amp;A. 3. Reflection slip submitted.</a:t>
-            </a:r>
-            <a:endParaRPr lang="en-US" sz="1300" dirty="0"/>
-          </a:p>
-        </p:txBody>
-      </p:sp>
-      <p:sp>
-        <p:nvSpPr>
-          <p:cNvPr id="8" name="Text 6"/>
-          <p:cNvSpPr/>
-          <p:nvPr/>
-        </p:nvSpPr>
-        <p:spPr>
-          <a:xfrm>
-            <a:off x="692051" y="1843236"/>
-            <a:ext cx="7973389" cy="230981"/>
-          </a:xfrm>
-          <a:prstGeom prst="rect">
-            <a:avLst/>
-          </a:prstGeom>
-          <a:noFill/>
-          <a:ln/>
-        </p:spPr>
-        <p:txBody>
-          <a:bodyPr wrap="square" lIns="0" tIns="0" rIns="0" bIns="0" rtlCol="0" anchor="t"/>
-          <a:lstStyle/>
-          <a:p>
+              <a:rPr lang="en-US" sz="1200" b="1" dirty="0">
+                <a:solidFill>
+                  <a:srgbClr val="1C2833"/>
+                </a:solidFill>
+                <a:latin typeface="Arial" pitchFamily="34" charset="0"/>
+                <a:ea typeface="Arial" pitchFamily="34" charset="-122"/>
+                <a:cs typeface="Arial" pitchFamily="34" charset="-120"/>
+              </a:rPr>
+              <a:t>Either split presentations across Day 9 and Day 10, or schedule a separate showcase session.</a:t>
+            </a:r>
             <a:pPr algn="l" indent="0" marL="0">
               <a:lnSpc>
-                <a:spcPts val="1820"/>
+                <a:spcPts val="1680"/>
               </a:lnSpc>
               <a:spcBef>
                 <a:spcPts val="300"/>
@@ -4721,23 +5519,23 @@
               <a:buNone/>
             </a:pPr>
             <a:r>
-              <a:rPr lang="en-US" sz="1300" i="1" dirty="0">
-                <a:solidFill>
-                  <a:srgbClr val="1C2833"/>
-                </a:solidFill>
-                <a:latin typeface="Georgia" pitchFamily="34" charset="0"/>
-                <a:ea typeface="Georgia" pitchFamily="34" charset="-122"/>
-                <a:cs typeface="Georgia" pitchFamily="34" charset="-120"/>
-              </a:rPr>
-              <a:t>By end of class, you've shown what you learned. Take a breath.</a:t>
-            </a:r>
-            <a:endParaRPr lang="en-US" sz="1300" dirty="0"/>
-          </a:p>
-        </p:txBody>
-      </p:sp>
-      <p:sp>
-        <p:nvSpPr>
-          <p:cNvPr id="9" name="Text 7"/>
+              <a:rPr lang="en-US" sz="1200" dirty="0">
+                <a:solidFill>
+                  <a:srgbClr val="1C2833"/>
+                </a:solidFill>
+                <a:latin typeface="Arial" pitchFamily="34" charset="0"/>
+                <a:ea typeface="Arial" pitchFamily="34" charset="-122"/>
+                <a:cs typeface="Arial" pitchFamily="34" charset="-120"/>
+              </a:rPr>
+              <a:t> See the lesson-plan note.)</a:t>
+            </a:r>
+            <a:endParaRPr lang="en-US" sz="1200" dirty="0"/>
+          </a:p>
+        </p:txBody>
+      </p:sp>
+      <p:sp>
+        <p:nvSpPr>
+          <p:cNvPr id="5" name="Text 3"/>
           <p:cNvSpPr/>
           <p:nvPr/>
         </p:nvSpPr>
@@ -4887,7 +5685,7 @@
                 <a:ea typeface="Georgia" pitchFamily="34" charset="-122"/>
                 <a:cs typeface="Georgia" pitchFamily="34" charset="-120"/>
               </a:rPr>
-              <a:t>Homework</a:t>
+              <a:t>Wrap-up (2 min)</a:t>
             </a:r>
             <a:endParaRPr lang="en-US" sz="1800" dirty="0"/>
           </a:p>
@@ -4902,7 +5700,7 @@
         <p:spPr>
           <a:xfrm>
             <a:off x="634901" y="883593"/>
-            <a:ext cx="8102798" cy="281880"/>
+            <a:ext cx="8102798" cy="975122"/>
           </a:xfrm>
           <a:prstGeom prst="rect">
             <a:avLst/>
@@ -4925,7 +5723,7 @@
               <a:buChar char="•"/>
             </a:pPr>
             <a:r>
-              <a:rPr lang="en-US" sz="1200" b="1" dirty="0">
+              <a:rPr lang="en-US" sz="1200" i="1" dirty="0">
                 <a:solidFill>
                   <a:srgbClr val="1C2833"/>
                 </a:solidFill>
@@ -4933,16 +5731,20 @@
                 <a:ea typeface="Arial" pitchFamily="34" charset="-122"/>
                 <a:cs typeface="Arial" pitchFamily="34" charset="-120"/>
               </a:rPr>
-              <a:t>None.</a:t>
-            </a:r>
-            <a:pPr algn="l" indent="0" marL="0">
+              <a:t>"You've each kept a 10-night Moon diary. You've built a tithi calendar. You've explained eclipses. You've presented a project. Look up tonight — you'll see the Moon a little differently."</a:t>
+            </a:r>
+            <a:endParaRPr lang="en-US" sz="1200" dirty="0"/>
+          </a:p>
+          <a:p>
+            <a:pPr algn="l" marL="342900" indent="-342900">
               <a:lnSpc>
                 <a:spcPts val="1620"/>
               </a:lnSpc>
               <a:spcAft>
                 <a:spcPts val="300"/>
               </a:spcAft>
-              <a:buNone/>
+              <a:buSzPct val="100000"/>
+              <a:buChar char="•"/>
             </a:pPr>
             <a:r>
               <a:rPr lang="en-US" sz="1200" dirty="0">
@@ -4953,7 +5755,31 @@
                 <a:ea typeface="Arial" pitchFamily="34" charset="-122"/>
                 <a:cs typeface="Arial" pitchFamily="34" charset="-120"/>
               </a:rPr>
-              <a:t> Module complete.</a:t>
+              <a:t>Reflection slips submitted with projects.</a:t>
+            </a:r>
+            <a:endParaRPr lang="en-US" sz="1200" dirty="0"/>
+          </a:p>
+          <a:p>
+            <a:pPr algn="l" marL="342900" indent="-342900">
+              <a:lnSpc>
+                <a:spcPts val="1620"/>
+              </a:lnSpc>
+              <a:spcAft>
+                <a:spcPts val="300"/>
+              </a:spcAft>
+              <a:buSzPct val="100000"/>
+              <a:buChar char="•"/>
+            </a:pPr>
+            <a:r>
+              <a:rPr lang="en-US" sz="1200" dirty="0">
+                <a:solidFill>
+                  <a:srgbClr val="1C2833"/>
+                </a:solidFill>
+                <a:latin typeface="Arial" pitchFamily="34" charset="0"/>
+                <a:ea typeface="Arial" pitchFamily="34" charset="-122"/>
+                <a:cs typeface="Arial" pitchFamily="34" charset="-120"/>
+              </a:rPr>
+              <a:t>Collect Moon diaries.</a:t>
             </a:r>
             <a:endParaRPr lang="en-US" sz="1200" dirty="0"/>
           </a:p>
